--- a/documentos/Banner_FECAP_ADS_EDUCA+.pptx
+++ b/documentos/Banner_FECAP_ADS_EDUCA+.pptx
@@ -141,980 +141,6 @@
 </p:presentation>
 </file>
 
-<file path=ppt/charts/chart1.xml><?xml version="1.0" encoding="utf-8"?>
-<c:chartSpace xmlns:c="http://schemas.openxmlformats.org/drawingml/2006/chart" xmlns:a="http://schemas.openxmlformats.org/drawingml/2006/main" xmlns:r="http://schemas.openxmlformats.org/officeDocument/2006/relationships" xmlns:c16r2="http://schemas.microsoft.com/office/drawing/2015/06/chart">
-  <c:date1904 val="0"/>
-  <c:lang val="pt-BR"/>
-  <c:roundedCorners val="0"/>
-  <mc:AlternateContent xmlns:mc="http://schemas.openxmlformats.org/markup-compatibility/2006">
-    <mc:Choice xmlns:c14="http://schemas.microsoft.com/office/drawing/2007/8/2/chart" Requires="c14">
-      <c14:style val="105"/>
-    </mc:Choice>
-    <mc:Fallback>
-      <c:style val="5"/>
-    </mc:Fallback>
-  </mc:AlternateContent>
-  <c:chart>
-    <c:title>
-      <c:tx>
-        <c:rich>
-          <a:bodyPr rot="0" spcFirstLastPara="1" vertOverflow="ellipsis" vert="horz" wrap="square" anchor="ctr" anchorCtr="1"/>
-          <a:lstStyle/>
-          <a:p>
-            <a:pPr>
-              <a:defRPr sz="1862" b="0" i="0" u="none" strike="noStrike" kern="1200" spc="0" baseline="0">
-                <a:ln>
-                  <a:noFill/>
-                </a:ln>
-                <a:solidFill>
-                  <a:schemeClr val="tx1"/>
-                </a:solidFill>
-                <a:effectLst>
-                  <a:innerShdw blurRad="63500" dist="50800" dir="13500000">
-                    <a:prstClr val="black">
-                      <a:alpha val="58000"/>
-                    </a:prstClr>
-                  </a:innerShdw>
-                </a:effectLst>
-                <a:latin typeface="+mn-lt"/>
-                <a:ea typeface="+mn-ea"/>
-                <a:cs typeface="+mn-cs"/>
-              </a:defRPr>
-            </a:pPr>
-            <a:r>
-              <a:rPr lang="pt-BR"/>
-              <a:t>Uso de Acessos por Tipo de Pacote (%)</a:t>
-            </a:r>
-          </a:p>
-        </c:rich>
-      </c:tx>
-      <c:overlay val="0"/>
-      <c:spPr>
-        <a:noFill/>
-        <a:ln>
-          <a:noFill/>
-        </a:ln>
-        <a:effectLst/>
-      </c:spPr>
-      <c:txPr>
-        <a:bodyPr rot="0" spcFirstLastPara="1" vertOverflow="ellipsis" vert="horz" wrap="square" anchor="ctr" anchorCtr="1"/>
-        <a:lstStyle/>
-        <a:p>
-          <a:pPr>
-            <a:defRPr sz="1862" b="0" i="0" u="none" strike="noStrike" kern="1200" spc="0" baseline="0">
-              <a:ln>
-                <a:noFill/>
-              </a:ln>
-              <a:solidFill>
-                <a:schemeClr val="tx1"/>
-              </a:solidFill>
-              <a:effectLst>
-                <a:innerShdw blurRad="63500" dist="50800" dir="13500000">
-                  <a:prstClr val="black">
-                    <a:alpha val="58000"/>
-                  </a:prstClr>
-                </a:innerShdw>
-              </a:effectLst>
-              <a:latin typeface="+mn-lt"/>
-              <a:ea typeface="+mn-ea"/>
-              <a:cs typeface="+mn-cs"/>
-            </a:defRPr>
-          </a:pPr>
-          <a:endParaRPr lang="pt-BR"/>
-        </a:p>
-      </c:txPr>
-    </c:title>
-    <c:autoTitleDeleted val="0"/>
-    <c:plotArea>
-      <c:layout>
-        <c:manualLayout>
-          <c:layoutTarget val="inner"/>
-          <c:xMode val="edge"/>
-          <c:yMode val="edge"/>
-          <c:x val="0.10581789095557292"/>
-          <c:y val="9.6464013469668944E-2"/>
-          <c:w val="0.86773271077211522"/>
-          <c:h val="0.87015130923958339"/>
-        </c:manualLayout>
-      </c:layout>
-      <c:barChart>
-        <c:barDir val="bar"/>
-        <c:grouping val="stacked"/>
-        <c:varyColors val="0"/>
-        <c:ser>
-          <c:idx val="0"/>
-          <c:order val="0"/>
-          <c:tx>
-            <c:strRef>
-              <c:f>Planilha1!$B$1</c:f>
-              <c:strCache>
-                <c:ptCount val="1"/>
-                <c:pt idx="0">
-                  <c:v>Uso (%)</c:v>
-                </c:pt>
-              </c:strCache>
-            </c:strRef>
-          </c:tx>
-          <c:spPr>
-            <a:solidFill>
-              <a:schemeClr val="accent3">
-                <a:shade val="76000"/>
-              </a:schemeClr>
-            </a:solidFill>
-            <a:ln>
-              <a:noFill/>
-            </a:ln>
-            <a:effectLst/>
-          </c:spPr>
-          <c:invertIfNegative val="0"/>
-          <c:cat>
-            <c:strRef>
-              <c:f>Planilha1!$A$2:$A$4</c:f>
-              <c:strCache>
-                <c:ptCount val="3"/>
-                <c:pt idx="0">
-                  <c:v>Básico</c:v>
-                </c:pt>
-                <c:pt idx="1">
-                  <c:v>Intermediário</c:v>
-                </c:pt>
-                <c:pt idx="2">
-                  <c:v>Premium</c:v>
-                </c:pt>
-              </c:strCache>
-            </c:strRef>
-          </c:cat>
-          <c:val>
-            <c:numRef>
-              <c:f>Planilha1!$B$2:$B$4</c:f>
-              <c:numCache>
-                <c:formatCode>General</c:formatCode>
-                <c:ptCount val="3"/>
-                <c:pt idx="0">
-                  <c:v>65</c:v>
-                </c:pt>
-                <c:pt idx="1">
-                  <c:v>82</c:v>
-                </c:pt>
-                <c:pt idx="2">
-                  <c:v>94</c:v>
-                </c:pt>
-              </c:numCache>
-            </c:numRef>
-          </c:val>
-          <c:extLst>
-            <c:ext xmlns:c16="http://schemas.microsoft.com/office/drawing/2014/chart" uri="{C3380CC4-5D6E-409C-BE32-E72D297353CC}">
-              <c16:uniqueId val="{00000000-AC45-4EED-B3A3-EB94A3394D19}"/>
-            </c:ext>
-          </c:extLst>
-        </c:ser>
-        <c:ser>
-          <c:idx val="1"/>
-          <c:order val="1"/>
-          <c:tx>
-            <c:strRef>
-              <c:f>Planilha1!$C$1</c:f>
-              <c:strCache>
-                <c:ptCount val="1"/>
-                <c:pt idx="0">
-                  <c:v>Limite</c:v>
-                </c:pt>
-              </c:strCache>
-            </c:strRef>
-          </c:tx>
-          <c:spPr>
-            <a:solidFill>
-              <a:schemeClr val="accent3">
-                <a:tint val="77000"/>
-              </a:schemeClr>
-            </a:solidFill>
-            <a:ln>
-              <a:noFill/>
-            </a:ln>
-            <a:effectLst/>
-          </c:spPr>
-          <c:invertIfNegative val="0"/>
-          <c:cat>
-            <c:strRef>
-              <c:f>Planilha1!$A$2:$A$4</c:f>
-              <c:strCache>
-                <c:ptCount val="3"/>
-                <c:pt idx="0">
-                  <c:v>Básico</c:v>
-                </c:pt>
-                <c:pt idx="1">
-                  <c:v>Intermediário</c:v>
-                </c:pt>
-                <c:pt idx="2">
-                  <c:v>Premium</c:v>
-                </c:pt>
-              </c:strCache>
-            </c:strRef>
-          </c:cat>
-          <c:val>
-            <c:numRef>
-              <c:f>Planilha1!$C$2:$C$4</c:f>
-              <c:numCache>
-                <c:formatCode>General</c:formatCode>
-                <c:ptCount val="3"/>
-              </c:numCache>
-            </c:numRef>
-          </c:val>
-          <c:extLst>
-            <c:ext xmlns:c16="http://schemas.microsoft.com/office/drawing/2014/chart" uri="{C3380CC4-5D6E-409C-BE32-E72D297353CC}">
-              <c16:uniqueId val="{00000001-AC45-4EED-B3A3-EB94A3394D19}"/>
-            </c:ext>
-          </c:extLst>
-        </c:ser>
-        <c:dLbls>
-          <c:showLegendKey val="0"/>
-          <c:showVal val="0"/>
-          <c:showCatName val="0"/>
-          <c:showSerName val="0"/>
-          <c:showPercent val="0"/>
-          <c:showBubbleSize val="0"/>
-        </c:dLbls>
-        <c:gapWidth val="150"/>
-        <c:overlap val="100"/>
-        <c:axId val="353182696"/>
-        <c:axId val="353185576"/>
-      </c:barChart>
-      <c:catAx>
-        <c:axId val="353182696"/>
-        <c:scaling>
-          <c:orientation val="minMax"/>
-        </c:scaling>
-        <c:delete val="0"/>
-        <c:axPos val="l"/>
-        <c:numFmt formatCode="General" sourceLinked="1"/>
-        <c:majorTickMark val="none"/>
-        <c:minorTickMark val="none"/>
-        <c:tickLblPos val="nextTo"/>
-        <c:spPr>
-          <a:noFill/>
-          <a:ln w="9525" cap="flat" cmpd="sng" algn="ctr">
-            <a:solidFill>
-              <a:schemeClr val="tx1">
-                <a:lumMod val="15000"/>
-                <a:lumOff val="85000"/>
-              </a:schemeClr>
-            </a:solidFill>
-            <a:round/>
-          </a:ln>
-          <a:effectLst/>
-        </c:spPr>
-        <c:txPr>
-          <a:bodyPr rot="-60000000" spcFirstLastPara="1" vertOverflow="ellipsis" vert="horz" wrap="square" anchor="ctr" anchorCtr="1"/>
-          <a:lstStyle/>
-          <a:p>
-            <a:pPr>
-              <a:defRPr sz="1197" b="0" i="0" u="none" strike="noStrike" kern="1200" baseline="0">
-                <a:ln>
-                  <a:noFill/>
-                </a:ln>
-                <a:solidFill>
-                  <a:schemeClr val="tx1"/>
-                </a:solidFill>
-                <a:effectLst>
-                  <a:innerShdw blurRad="63500" dist="50800" dir="13500000">
-                    <a:prstClr val="black">
-                      <a:alpha val="58000"/>
-                    </a:prstClr>
-                  </a:innerShdw>
-                </a:effectLst>
-                <a:latin typeface="+mn-lt"/>
-                <a:ea typeface="+mn-ea"/>
-                <a:cs typeface="+mn-cs"/>
-              </a:defRPr>
-            </a:pPr>
-            <a:endParaRPr lang="pt-BR"/>
-          </a:p>
-        </c:txPr>
-        <c:crossAx val="353185576"/>
-        <c:crosses val="autoZero"/>
-        <c:auto val="1"/>
-        <c:lblAlgn val="ctr"/>
-        <c:lblOffset val="100"/>
-        <c:noMultiLvlLbl val="0"/>
-      </c:catAx>
-      <c:valAx>
-        <c:axId val="353185576"/>
-        <c:scaling>
-          <c:orientation val="minMax"/>
-        </c:scaling>
-        <c:delete val="0"/>
-        <c:axPos val="b"/>
-        <c:majorGridlines>
-          <c:spPr>
-            <a:ln w="9525" cap="flat" cmpd="sng" algn="ctr">
-              <a:solidFill>
-                <a:schemeClr val="tx1">
-                  <a:lumMod val="15000"/>
-                  <a:lumOff val="85000"/>
-                </a:schemeClr>
-              </a:solidFill>
-              <a:round/>
-            </a:ln>
-            <a:effectLst/>
-          </c:spPr>
-        </c:majorGridlines>
-        <c:numFmt formatCode="General" sourceLinked="1"/>
-        <c:majorTickMark val="none"/>
-        <c:minorTickMark val="none"/>
-        <c:tickLblPos val="nextTo"/>
-        <c:spPr>
-          <a:noFill/>
-          <a:ln>
-            <a:noFill/>
-          </a:ln>
-          <a:effectLst/>
-        </c:spPr>
-        <c:txPr>
-          <a:bodyPr rot="-60000000" spcFirstLastPara="1" vertOverflow="ellipsis" vert="horz" wrap="square" anchor="ctr" anchorCtr="1"/>
-          <a:lstStyle/>
-          <a:p>
-            <a:pPr>
-              <a:defRPr sz="1197" b="0" i="0" u="none" strike="noStrike" kern="1200" baseline="0">
-                <a:ln>
-                  <a:noFill/>
-                </a:ln>
-                <a:solidFill>
-                  <a:schemeClr val="tx1"/>
-                </a:solidFill>
-                <a:effectLst>
-                  <a:innerShdw blurRad="63500" dist="50800" dir="13500000">
-                    <a:prstClr val="black">
-                      <a:alpha val="58000"/>
-                    </a:prstClr>
-                  </a:innerShdw>
-                </a:effectLst>
-                <a:latin typeface="+mn-lt"/>
-                <a:ea typeface="+mn-ea"/>
-                <a:cs typeface="+mn-cs"/>
-              </a:defRPr>
-            </a:pPr>
-            <a:endParaRPr lang="pt-BR"/>
-          </a:p>
-        </c:txPr>
-        <c:crossAx val="353182696"/>
-        <c:crosses val="autoZero"/>
-        <c:crossBetween val="between"/>
-      </c:valAx>
-      <c:spPr>
-        <a:noFill/>
-        <a:ln>
-          <a:noFill/>
-        </a:ln>
-        <a:effectLst/>
-      </c:spPr>
-    </c:plotArea>
-    <c:legend>
-      <c:legendPos val="b"/>
-      <c:layout>
-        <c:manualLayout>
-          <c:xMode val="edge"/>
-          <c:yMode val="edge"/>
-          <c:x val="0.44578904601015712"/>
-          <c:y val="0.9092687312834985"/>
-          <c:w val="0.11974363241345019"/>
-          <c:h val="4.175786249720026E-2"/>
-        </c:manualLayout>
-      </c:layout>
-      <c:overlay val="0"/>
-      <c:spPr>
-        <a:noFill/>
-        <a:ln>
-          <a:noFill/>
-        </a:ln>
-        <a:effectLst/>
-      </c:spPr>
-      <c:txPr>
-        <a:bodyPr rot="0" spcFirstLastPara="1" vertOverflow="ellipsis" vert="horz" wrap="square" anchor="ctr" anchorCtr="1"/>
-        <a:lstStyle/>
-        <a:p>
-          <a:pPr>
-            <a:defRPr sz="1197" b="0" i="0" u="none" strike="noStrike" kern="1200" baseline="0">
-              <a:ln>
-                <a:noFill/>
-              </a:ln>
-              <a:solidFill>
-                <a:schemeClr val="tx1"/>
-              </a:solidFill>
-              <a:effectLst>
-                <a:innerShdw blurRad="63500" dist="50800" dir="13500000">
-                  <a:prstClr val="black">
-                    <a:alpha val="58000"/>
-                  </a:prstClr>
-                </a:innerShdw>
-              </a:effectLst>
-              <a:latin typeface="+mn-lt"/>
-              <a:ea typeface="+mn-ea"/>
-              <a:cs typeface="+mn-cs"/>
-            </a:defRPr>
-          </a:pPr>
-          <a:endParaRPr lang="pt-BR"/>
-        </a:p>
-      </c:txPr>
-    </c:legend>
-    <c:plotVisOnly val="1"/>
-    <c:dispBlanksAs val="gap"/>
-    <c:showDLblsOverMax val="0"/>
-    <c:extLst>
-      <c:ext xmlns:c16r3="http://schemas.microsoft.com/office/drawing/2017/03/chart" uri="{56B9EC1D-385E-4148-901F-78D8002777C0}">
-        <c16r3:dataDisplayOptions16>
-          <c16r3:dispNaAsBlank val="1"/>
-        </c16r3:dataDisplayOptions16>
-      </c:ext>
-    </c:extLst>
-  </c:chart>
-  <c:spPr>
-    <a:noFill/>
-    <a:ln>
-      <a:noFill/>
-    </a:ln>
-    <a:effectLst/>
-  </c:spPr>
-  <c:txPr>
-    <a:bodyPr/>
-    <a:lstStyle/>
-    <a:p>
-      <a:pPr>
-        <a:defRPr>
-          <a:ln>
-            <a:noFill/>
-          </a:ln>
-          <a:solidFill>
-            <a:schemeClr val="tx1"/>
-          </a:solidFill>
-          <a:effectLst>
-            <a:innerShdw blurRad="63500" dist="50800" dir="13500000">
-              <a:prstClr val="black">
-                <a:alpha val="58000"/>
-              </a:prstClr>
-            </a:innerShdw>
-          </a:effectLst>
-        </a:defRPr>
-      </a:pPr>
-      <a:endParaRPr lang="pt-BR"/>
-    </a:p>
-  </c:txPr>
-  <c:externalData r:id="rId3">
-    <c:autoUpdate val="0"/>
-  </c:externalData>
-</c:chartSpace>
-</file>
-
-<file path=ppt/charts/colors1.xml><?xml version="1.0" encoding="utf-8"?>
-<cs:colorStyle xmlns:cs="http://schemas.microsoft.com/office/drawing/2012/chartStyle" xmlns:a="http://schemas.openxmlformats.org/drawingml/2006/main" meth="withinLinear" id="16">
-  <a:schemeClr val="accent3"/>
-</cs:colorStyle>
-</file>
-
-<file path=ppt/charts/style1.xml><?xml version="1.0" encoding="utf-8"?>
-<cs:chartStyle xmlns:cs="http://schemas.microsoft.com/office/drawing/2012/chartStyle" xmlns:a="http://schemas.openxmlformats.org/drawingml/2006/main" id="297">
-  <cs:axisTitle>
-    <cs:lnRef idx="0"/>
-    <cs:fillRef idx="0"/>
-    <cs:effectRef idx="0"/>
-    <cs:fontRef idx="minor">
-      <a:schemeClr val="tx1">
-        <a:lumMod val="65000"/>
-        <a:lumOff val="35000"/>
-      </a:schemeClr>
-    </cs:fontRef>
-    <cs:defRPr sz="1330" kern="1200"/>
-  </cs:axisTitle>
-  <cs:categoryAxis>
-    <cs:lnRef idx="0"/>
-    <cs:fillRef idx="0"/>
-    <cs:effectRef idx="0"/>
-    <cs:fontRef idx="minor">
-      <a:schemeClr val="tx1">
-        <a:lumMod val="65000"/>
-        <a:lumOff val="35000"/>
-      </a:schemeClr>
-    </cs:fontRef>
-    <cs:spPr>
-      <a:ln w="9525" cap="flat" cmpd="sng" algn="ctr">
-        <a:solidFill>
-          <a:schemeClr val="tx1">
-            <a:lumMod val="15000"/>
-            <a:lumOff val="85000"/>
-          </a:schemeClr>
-        </a:solidFill>
-        <a:round/>
-      </a:ln>
-    </cs:spPr>
-    <cs:defRPr sz="1197" kern="1200"/>
-  </cs:categoryAxis>
-  <cs:chartArea mods="allowNoFillOverride allowNoLineOverride">
-    <cs:lnRef idx="0"/>
-    <cs:fillRef idx="0"/>
-    <cs:effectRef idx="0"/>
-    <cs:fontRef idx="minor">
-      <a:schemeClr val="tx1"/>
-    </cs:fontRef>
-    <cs:spPr>
-      <a:solidFill>
-        <a:schemeClr val="bg1"/>
-      </a:solidFill>
-      <a:ln w="9525" cap="flat" cmpd="sng" algn="ctr">
-        <a:solidFill>
-          <a:schemeClr val="tx1">
-            <a:lumMod val="15000"/>
-            <a:lumOff val="85000"/>
-          </a:schemeClr>
-        </a:solidFill>
-        <a:round/>
-      </a:ln>
-    </cs:spPr>
-    <cs:defRPr sz="1330" kern="1200"/>
-  </cs:chartArea>
-  <cs:dataLabel>
-    <cs:lnRef idx="0"/>
-    <cs:fillRef idx="0"/>
-    <cs:effectRef idx="0"/>
-    <cs:fontRef idx="minor">
-      <a:schemeClr val="tx1">
-        <a:lumMod val="75000"/>
-        <a:lumOff val="25000"/>
-      </a:schemeClr>
-    </cs:fontRef>
-    <cs:defRPr sz="1197" kern="1200"/>
-  </cs:dataLabel>
-  <cs:dataLabelCallout>
-    <cs:lnRef idx="0"/>
-    <cs:fillRef idx="0"/>
-    <cs:effectRef idx="0"/>
-    <cs:fontRef idx="minor">
-      <a:schemeClr val="dk1">
-        <a:lumMod val="65000"/>
-        <a:lumOff val="35000"/>
-      </a:schemeClr>
-    </cs:fontRef>
-    <cs:spPr>
-      <a:solidFill>
-        <a:schemeClr val="lt1"/>
-      </a:solidFill>
-      <a:ln>
-        <a:solidFill>
-          <a:schemeClr val="dk1">
-            <a:lumMod val="25000"/>
-            <a:lumOff val="75000"/>
-          </a:schemeClr>
-        </a:solidFill>
-      </a:ln>
-    </cs:spPr>
-    <cs:defRPr sz="1197" kern="1200"/>
-    <cs:bodyPr rot="0" spcFirstLastPara="1" vertOverflow="clip" horzOverflow="clip" vert="horz" wrap="square" lIns="36576" tIns="18288" rIns="36576" bIns="18288" anchor="ctr" anchorCtr="1">
-      <a:spAutoFit/>
-    </cs:bodyPr>
-  </cs:dataLabelCallout>
-  <cs:dataPoint>
-    <cs:lnRef idx="0"/>
-    <cs:fillRef idx="1">
-      <cs:styleClr val="auto"/>
-    </cs:fillRef>
-    <cs:effectRef idx="0"/>
-    <cs:fontRef idx="minor">
-      <a:schemeClr val="tx1"/>
-    </cs:fontRef>
-  </cs:dataPoint>
-  <cs:dataPoint3D>
-    <cs:lnRef idx="0"/>
-    <cs:fillRef idx="1">
-      <cs:styleClr val="auto"/>
-    </cs:fillRef>
-    <cs:effectRef idx="0"/>
-    <cs:fontRef idx="minor">
-      <a:schemeClr val="tx1"/>
-    </cs:fontRef>
-  </cs:dataPoint3D>
-  <cs:dataPointLine>
-    <cs:lnRef idx="0">
-      <cs:styleClr val="auto"/>
-    </cs:lnRef>
-    <cs:fillRef idx="1"/>
-    <cs:effectRef idx="0"/>
-    <cs:fontRef idx="minor">
-      <a:schemeClr val="tx1"/>
-    </cs:fontRef>
-    <cs:spPr>
-      <a:ln w="28575" cap="rnd">
-        <a:solidFill>
-          <a:schemeClr val="phClr"/>
-        </a:solidFill>
-        <a:round/>
-      </a:ln>
-    </cs:spPr>
-  </cs:dataPointLine>
-  <cs:dataPointMarker>
-    <cs:lnRef idx="0">
-      <cs:styleClr val="auto"/>
-    </cs:lnRef>
-    <cs:fillRef idx="1">
-      <cs:styleClr val="auto"/>
-    </cs:fillRef>
-    <cs:effectRef idx="0"/>
-    <cs:fontRef idx="minor">
-      <a:schemeClr val="tx1"/>
-    </cs:fontRef>
-    <cs:spPr>
-      <a:ln w="9525">
-        <a:solidFill>
-          <a:schemeClr val="phClr"/>
-        </a:solidFill>
-      </a:ln>
-    </cs:spPr>
-  </cs:dataPointMarker>
-  <cs:dataPointMarkerLayout symbol="circle" size="5"/>
-  <cs:dataPointWireframe>
-    <cs:lnRef idx="0">
-      <cs:styleClr val="auto"/>
-    </cs:lnRef>
-    <cs:fillRef idx="1"/>
-    <cs:effectRef idx="0"/>
-    <cs:fontRef idx="minor">
-      <a:schemeClr val="tx1"/>
-    </cs:fontRef>
-    <cs:spPr>
-      <a:ln w="9525" cap="rnd">
-        <a:solidFill>
-          <a:schemeClr val="phClr"/>
-        </a:solidFill>
-        <a:round/>
-      </a:ln>
-    </cs:spPr>
-  </cs:dataPointWireframe>
-  <cs:dataTable>
-    <cs:lnRef idx="0"/>
-    <cs:fillRef idx="0"/>
-    <cs:effectRef idx="0"/>
-    <cs:fontRef idx="minor">
-      <a:schemeClr val="tx1">
-        <a:lumMod val="65000"/>
-        <a:lumOff val="35000"/>
-      </a:schemeClr>
-    </cs:fontRef>
-    <cs:spPr>
-      <a:noFill/>
-      <a:ln w="9525" cap="flat" cmpd="sng" algn="ctr">
-        <a:solidFill>
-          <a:schemeClr val="tx1">
-            <a:lumMod val="15000"/>
-            <a:lumOff val="85000"/>
-          </a:schemeClr>
-        </a:solidFill>
-        <a:round/>
-      </a:ln>
-    </cs:spPr>
-    <cs:defRPr sz="1197" kern="1200"/>
-  </cs:dataTable>
-  <cs:downBar>
-    <cs:lnRef idx="0"/>
-    <cs:fillRef idx="0"/>
-    <cs:effectRef idx="0"/>
-    <cs:fontRef idx="minor">
-      <a:schemeClr val="tx1"/>
-    </cs:fontRef>
-    <cs:spPr>
-      <a:solidFill>
-        <a:schemeClr val="dk1">
-          <a:lumMod val="75000"/>
-          <a:lumOff val="25000"/>
-        </a:schemeClr>
-      </a:solidFill>
-      <a:ln w="9525" cap="flat" cmpd="sng" algn="ctr">
-        <a:solidFill>
-          <a:schemeClr val="tx1">
-            <a:lumMod val="65000"/>
-            <a:lumOff val="35000"/>
-          </a:schemeClr>
-        </a:solidFill>
-        <a:round/>
-      </a:ln>
-    </cs:spPr>
-  </cs:downBar>
-  <cs:dropLine>
-    <cs:lnRef idx="0"/>
-    <cs:fillRef idx="0"/>
-    <cs:effectRef idx="0"/>
-    <cs:fontRef idx="minor">
-      <a:schemeClr val="tx1"/>
-    </cs:fontRef>
-    <cs:spPr>
-      <a:ln w="9525" cap="flat" cmpd="sng" algn="ctr">
-        <a:solidFill>
-          <a:schemeClr val="tx1">
-            <a:lumMod val="35000"/>
-            <a:lumOff val="65000"/>
-          </a:schemeClr>
-        </a:solidFill>
-        <a:round/>
-      </a:ln>
-    </cs:spPr>
-  </cs:dropLine>
-  <cs:errorBar>
-    <cs:lnRef idx="0"/>
-    <cs:fillRef idx="0"/>
-    <cs:effectRef idx="0"/>
-    <cs:fontRef idx="minor">
-      <a:schemeClr val="tx1"/>
-    </cs:fontRef>
-    <cs:spPr>
-      <a:ln w="9525" cap="flat" cmpd="sng" algn="ctr">
-        <a:solidFill>
-          <a:schemeClr val="tx1">
-            <a:lumMod val="65000"/>
-            <a:lumOff val="35000"/>
-          </a:schemeClr>
-        </a:solidFill>
-        <a:round/>
-      </a:ln>
-    </cs:spPr>
-  </cs:errorBar>
-  <cs:floor>
-    <cs:lnRef idx="0"/>
-    <cs:fillRef idx="0"/>
-    <cs:effectRef idx="0"/>
-    <cs:fontRef idx="minor">
-      <a:schemeClr val="tx1"/>
-    </cs:fontRef>
-    <cs:spPr>
-      <a:noFill/>
-      <a:ln>
-        <a:noFill/>
-      </a:ln>
-    </cs:spPr>
-  </cs:floor>
-  <cs:gridlineMajor>
-    <cs:lnRef idx="0"/>
-    <cs:fillRef idx="0"/>
-    <cs:effectRef idx="0"/>
-    <cs:fontRef idx="minor">
-      <a:schemeClr val="tx1"/>
-    </cs:fontRef>
-    <cs:spPr>
-      <a:ln w="9525" cap="flat" cmpd="sng" algn="ctr">
-        <a:solidFill>
-          <a:schemeClr val="tx1">
-            <a:lumMod val="15000"/>
-            <a:lumOff val="85000"/>
-          </a:schemeClr>
-        </a:solidFill>
-        <a:round/>
-      </a:ln>
-    </cs:spPr>
-  </cs:gridlineMajor>
-  <cs:gridlineMinor>
-    <cs:lnRef idx="0"/>
-    <cs:fillRef idx="0"/>
-    <cs:effectRef idx="0"/>
-    <cs:fontRef idx="minor">
-      <a:schemeClr val="tx1"/>
-    </cs:fontRef>
-    <cs:spPr>
-      <a:ln w="9525" cap="flat" cmpd="sng" algn="ctr">
-        <a:solidFill>
-          <a:schemeClr val="tx1">
-            <a:lumMod val="5000"/>
-            <a:lumOff val="95000"/>
-          </a:schemeClr>
-        </a:solidFill>
-        <a:round/>
-      </a:ln>
-    </cs:spPr>
-  </cs:gridlineMinor>
-  <cs:hiLoLine>
-    <cs:lnRef idx="0"/>
-    <cs:fillRef idx="0"/>
-    <cs:effectRef idx="0"/>
-    <cs:fontRef idx="minor">
-      <a:schemeClr val="tx1"/>
-    </cs:fontRef>
-    <cs:spPr>
-      <a:ln w="9525" cap="flat" cmpd="sng" algn="ctr">
-        <a:solidFill>
-          <a:schemeClr val="tx1">
-            <a:lumMod val="50000"/>
-            <a:lumOff val="50000"/>
-          </a:schemeClr>
-        </a:solidFill>
-        <a:round/>
-      </a:ln>
-    </cs:spPr>
-  </cs:hiLoLine>
-  <cs:leaderLine>
-    <cs:lnRef idx="0"/>
-    <cs:fillRef idx="0"/>
-    <cs:effectRef idx="0"/>
-    <cs:fontRef idx="minor">
-      <a:schemeClr val="tx1"/>
-    </cs:fontRef>
-    <cs:spPr>
-      <a:ln w="9525" cap="flat" cmpd="sng" algn="ctr">
-        <a:solidFill>
-          <a:schemeClr val="tx1">
-            <a:lumMod val="35000"/>
-            <a:lumOff val="65000"/>
-          </a:schemeClr>
-        </a:solidFill>
-        <a:round/>
-      </a:ln>
-    </cs:spPr>
-  </cs:leaderLine>
-  <cs:legend>
-    <cs:lnRef idx="0"/>
-    <cs:fillRef idx="0"/>
-    <cs:effectRef idx="0"/>
-    <cs:fontRef idx="minor">
-      <a:schemeClr val="tx1">
-        <a:lumMod val="65000"/>
-        <a:lumOff val="35000"/>
-      </a:schemeClr>
-    </cs:fontRef>
-    <cs:defRPr sz="1197" kern="1200"/>
-  </cs:legend>
-  <cs:plotArea mods="allowNoFillOverride allowNoLineOverride">
-    <cs:lnRef idx="0"/>
-    <cs:fillRef idx="0"/>
-    <cs:effectRef idx="0"/>
-    <cs:fontRef idx="minor">
-      <a:schemeClr val="tx1"/>
-    </cs:fontRef>
-  </cs:plotArea>
-  <cs:plotArea3D mods="allowNoFillOverride allowNoLineOverride">
-    <cs:lnRef idx="0"/>
-    <cs:fillRef idx="0"/>
-    <cs:effectRef idx="0"/>
-    <cs:fontRef idx="minor">
-      <a:schemeClr val="tx1"/>
-    </cs:fontRef>
-  </cs:plotArea3D>
-  <cs:seriesAxis>
-    <cs:lnRef idx="0"/>
-    <cs:fillRef idx="0"/>
-    <cs:effectRef idx="0"/>
-    <cs:fontRef idx="minor">
-      <a:schemeClr val="tx1">
-        <a:lumMod val="65000"/>
-        <a:lumOff val="35000"/>
-      </a:schemeClr>
-    </cs:fontRef>
-    <cs:defRPr sz="1197" kern="1200"/>
-  </cs:seriesAxis>
-  <cs:seriesLine>
-    <cs:lnRef idx="0"/>
-    <cs:fillRef idx="0"/>
-    <cs:effectRef idx="0"/>
-    <cs:fontRef idx="minor">
-      <a:schemeClr val="tx1"/>
-    </cs:fontRef>
-    <cs:spPr>
-      <a:ln w="9525" cap="flat" cmpd="sng" algn="ctr">
-        <a:solidFill>
-          <a:schemeClr val="tx1">
-            <a:lumMod val="35000"/>
-            <a:lumOff val="65000"/>
-          </a:schemeClr>
-        </a:solidFill>
-        <a:round/>
-      </a:ln>
-    </cs:spPr>
-  </cs:seriesLine>
-  <cs:title>
-    <cs:lnRef idx="0"/>
-    <cs:fillRef idx="0"/>
-    <cs:effectRef idx="0"/>
-    <cs:fontRef idx="minor">
-      <a:schemeClr val="tx1">
-        <a:lumMod val="65000"/>
-        <a:lumOff val="35000"/>
-      </a:schemeClr>
-    </cs:fontRef>
-    <cs:defRPr sz="1862" b="0" kern="1200" spc="0" baseline="0"/>
-  </cs:title>
-  <cs:trendline>
-    <cs:lnRef idx="0">
-      <cs:styleClr val="auto"/>
-    </cs:lnRef>
-    <cs:fillRef idx="0"/>
-    <cs:effectRef idx="0"/>
-    <cs:fontRef idx="minor">
-      <a:schemeClr val="tx1"/>
-    </cs:fontRef>
-    <cs:spPr>
-      <a:ln w="19050" cap="rnd">
-        <a:solidFill>
-          <a:schemeClr val="phClr"/>
-        </a:solidFill>
-        <a:prstDash val="sysDot"/>
-      </a:ln>
-    </cs:spPr>
-  </cs:trendline>
-  <cs:trendlineLabel>
-    <cs:lnRef idx="0"/>
-    <cs:fillRef idx="0"/>
-    <cs:effectRef idx="0"/>
-    <cs:fontRef idx="minor">
-      <a:schemeClr val="tx1">
-        <a:lumMod val="65000"/>
-        <a:lumOff val="35000"/>
-      </a:schemeClr>
-    </cs:fontRef>
-    <cs:defRPr sz="1197" kern="1200"/>
-  </cs:trendlineLabel>
-  <cs:upBar>
-    <cs:lnRef idx="0"/>
-    <cs:fillRef idx="0"/>
-    <cs:effectRef idx="0"/>
-    <cs:fontRef idx="minor">
-      <a:schemeClr val="tx1"/>
-    </cs:fontRef>
-    <cs:spPr>
-      <a:solidFill>
-        <a:schemeClr val="lt1"/>
-      </a:solidFill>
-      <a:ln w="9525" cap="flat" cmpd="sng" algn="ctr">
-        <a:solidFill>
-          <a:schemeClr val="tx1">
-            <a:lumMod val="65000"/>
-            <a:lumOff val="35000"/>
-          </a:schemeClr>
-        </a:solidFill>
-        <a:round/>
-      </a:ln>
-    </cs:spPr>
-  </cs:upBar>
-  <cs:valueAxis>
-    <cs:lnRef idx="0"/>
-    <cs:fillRef idx="0"/>
-    <cs:effectRef idx="0"/>
-    <cs:fontRef idx="minor">
-      <a:schemeClr val="tx1">
-        <a:lumMod val="65000"/>
-        <a:lumOff val="35000"/>
-      </a:schemeClr>
-    </cs:fontRef>
-    <cs:defRPr sz="1197" kern="1200"/>
-  </cs:valueAxis>
-  <cs:wall>
-    <cs:lnRef idx="0"/>
-    <cs:fillRef idx="0"/>
-    <cs:effectRef idx="0"/>
-    <cs:fontRef idx="minor">
-      <a:schemeClr val="tx1"/>
-    </cs:fontRef>
-    <cs:spPr>
-      <a:noFill/>
-      <a:ln>
-        <a:noFill/>
-      </a:ln>
-    </cs:spPr>
-  </cs:wall>
-</cs:chartStyle>
-</file>
-
 <file path=ppt/slideLayouts/slideLayout1.xml><?xml version="1.0" encoding="utf-8"?>
 <p:sldLayout xmlns:a="http://schemas.openxmlformats.org/drawingml/2006/main" xmlns:r="http://schemas.openxmlformats.org/officeDocument/2006/relationships" xmlns:p="http://schemas.openxmlformats.org/presentationml/2006/main" type="title" preserve="1">
   <p:cSld name="Title Slide">
@@ -1295,7 +321,7 @@
             <a:fld id="{1D8BD707-D9CF-40AE-B4C6-C98DA3205C09}" type="datetimeFigureOut">
               <a:rPr lang="en-US" smtClean="0"/>
               <a:pPr/>
-              <a:t>5/4/2026</a:t>
+              <a:t>5/11/2026</a:t>
             </a:fld>
             <a:endParaRPr lang="en-US"/>
           </a:p>
@@ -1460,7 +486,7 @@
             <a:fld id="{1D8BD707-D9CF-40AE-B4C6-C98DA3205C09}" type="datetimeFigureOut">
               <a:rPr lang="en-US" smtClean="0"/>
               <a:pPr/>
-              <a:t>5/4/2026</a:t>
+              <a:t>5/11/2026</a:t>
             </a:fld>
             <a:endParaRPr lang="en-US"/>
           </a:p>
@@ -1635,7 +661,7 @@
             <a:fld id="{1D8BD707-D9CF-40AE-B4C6-C98DA3205C09}" type="datetimeFigureOut">
               <a:rPr lang="en-US" smtClean="0"/>
               <a:pPr/>
-              <a:t>5/4/2026</a:t>
+              <a:t>5/11/2026</a:t>
             </a:fld>
             <a:endParaRPr lang="en-US"/>
           </a:p>
@@ -1800,7 +826,7 @@
             <a:fld id="{1D8BD707-D9CF-40AE-B4C6-C98DA3205C09}" type="datetimeFigureOut">
               <a:rPr lang="en-US" smtClean="0"/>
               <a:pPr/>
-              <a:t>5/4/2026</a:t>
+              <a:t>5/11/2026</a:t>
             </a:fld>
             <a:endParaRPr lang="en-US"/>
           </a:p>
@@ -2042,7 +1068,7 @@
             <a:fld id="{1D8BD707-D9CF-40AE-B4C6-C98DA3205C09}" type="datetimeFigureOut">
               <a:rPr lang="en-US" smtClean="0"/>
               <a:pPr/>
-              <a:t>5/4/2026</a:t>
+              <a:t>5/11/2026</a:t>
             </a:fld>
             <a:endParaRPr lang="en-US"/>
           </a:p>
@@ -2324,7 +1350,7 @@
             <a:fld id="{1D8BD707-D9CF-40AE-B4C6-C98DA3205C09}" type="datetimeFigureOut">
               <a:rPr lang="en-US" smtClean="0"/>
               <a:pPr/>
-              <a:t>5/4/2026</a:t>
+              <a:t>5/11/2026</a:t>
             </a:fld>
             <a:endParaRPr lang="en-US"/>
           </a:p>
@@ -2740,7 +1766,7 @@
             <a:fld id="{1D8BD707-D9CF-40AE-B4C6-C98DA3205C09}" type="datetimeFigureOut">
               <a:rPr lang="en-US" smtClean="0"/>
               <a:pPr/>
-              <a:t>5/4/2026</a:t>
+              <a:t>5/11/2026</a:t>
             </a:fld>
             <a:endParaRPr lang="en-US"/>
           </a:p>
@@ -2854,7 +1880,7 @@
             <a:fld id="{1D8BD707-D9CF-40AE-B4C6-C98DA3205C09}" type="datetimeFigureOut">
               <a:rPr lang="en-US" smtClean="0"/>
               <a:pPr/>
-              <a:t>5/4/2026</a:t>
+              <a:t>5/11/2026</a:t>
             </a:fld>
             <a:endParaRPr lang="en-US"/>
           </a:p>
@@ -2946,7 +1972,7 @@
             <a:fld id="{1D8BD707-D9CF-40AE-B4C6-C98DA3205C09}" type="datetimeFigureOut">
               <a:rPr lang="en-US" smtClean="0"/>
               <a:pPr/>
-              <a:t>5/4/2026</a:t>
+              <a:t>5/11/2026</a:t>
             </a:fld>
             <a:endParaRPr lang="en-US"/>
           </a:p>
@@ -3218,7 +2244,7 @@
             <a:fld id="{1D8BD707-D9CF-40AE-B4C6-C98DA3205C09}" type="datetimeFigureOut">
               <a:rPr lang="en-US" smtClean="0"/>
               <a:pPr/>
-              <a:t>5/4/2026</a:t>
+              <a:t>5/11/2026</a:t>
             </a:fld>
             <a:endParaRPr lang="en-US"/>
           </a:p>
@@ -3467,7 +2493,7 @@
             <a:fld id="{1D8BD707-D9CF-40AE-B4C6-C98DA3205C09}" type="datetimeFigureOut">
               <a:rPr lang="en-US" smtClean="0"/>
               <a:pPr/>
-              <a:t>5/4/2026</a:t>
+              <a:t>5/11/2026</a:t>
             </a:fld>
             <a:endParaRPr lang="en-US"/>
           </a:p>
@@ -3675,7 +2701,7 @@
             <a:fld id="{1D8BD707-D9CF-40AE-B4C6-C98DA3205C09}" type="datetimeFigureOut">
               <a:rPr lang="en-US" smtClean="0"/>
               <a:pPr/>
-              <a:t>5/4/2026</a:t>
+              <a:t>5/11/2026</a:t>
             </a:fld>
             <a:endParaRPr lang="en-US"/>
           </a:p>
@@ -4703,8 +3729,8 @@
         </p:nvGrpSpPr>
         <p:grpSpPr>
           <a:xfrm rot="-5400000">
-            <a:off x="11357327" y="13418418"/>
-            <a:ext cx="20425133" cy="12527228"/>
+            <a:off x="11289110" y="13290109"/>
+            <a:ext cx="20491548" cy="12791303"/>
             <a:chOff x="0" y="0"/>
             <a:chExt cx="1922704" cy="1176995"/>
           </a:xfrm>
@@ -4759,7 +3785,7 @@
             <a:bodyPr/>
             <a:lstStyle/>
             <a:p>
-              <a:endParaRPr lang="pt-BR" sz="6769"/>
+              <a:endParaRPr lang="pt-BR" sz="6769" dirty="0"/>
             </a:p>
           </p:txBody>
         </p:sp>
@@ -4897,8 +3923,8 @@
         </p:nvGrpSpPr>
         <p:grpSpPr>
           <a:xfrm>
-            <a:off x="15403306" y="30283229"/>
-            <a:ext cx="12527228" cy="7981114"/>
+            <a:off x="15139231" y="30288233"/>
+            <a:ext cx="12791304" cy="7976109"/>
             <a:chOff x="0" y="0"/>
             <a:chExt cx="8764870" cy="5371264"/>
           </a:xfrm>
@@ -5613,95 +4639,6 @@
       </p:sp>
       <p:sp>
         <p:nvSpPr>
-          <p:cNvPr id="47" name="TextBox 47"/>
-          <p:cNvSpPr txBox="1"/>
-          <p:nvPr/>
-        </p:nvSpPr>
-        <p:spPr>
-          <a:xfrm>
-            <a:off x="15099844" y="23894125"/>
-            <a:ext cx="12433206" cy="429348"/>
-          </a:xfrm>
-          <a:prstGeom prst="rect">
-            <a:avLst/>
-          </a:prstGeom>
-        </p:spPr>
-        <p:txBody>
-          <a:bodyPr lIns="0" tIns="0" rIns="0" bIns="0" rtlCol="0" anchor="t">
-            <a:spAutoFit/>
-          </a:bodyPr>
-          <a:lstStyle/>
-          <a:p>
-            <a:pPr algn="ctr">
-              <a:lnSpc>
-                <a:spcPts val="3465"/>
-              </a:lnSpc>
-            </a:pPr>
-            <a:r>
-              <a:rPr lang="en-US" sz="2400" spc="130" dirty="0">
-                <a:solidFill>
-                  <a:srgbClr val="000000"/>
-                </a:solidFill>
-                <a:latin typeface="Open Sans 2" panose="020B0604020202020204" charset="0"/>
-                <a:ea typeface="Open Sans 2" panose="020B0604020202020204" charset="0"/>
-                <a:cs typeface="Open Sans 2" panose="020B0604020202020204" charset="0"/>
-                <a:sym typeface="Inter"/>
-              </a:rPr>
-              <a:t>Fonte: </a:t>
-            </a:r>
-            <a:r>
-              <a:rPr lang="en-US" sz="2400" spc="130" dirty="0" err="1">
-                <a:solidFill>
-                  <a:srgbClr val="000000"/>
-                </a:solidFill>
-                <a:latin typeface="Open Sans 2" panose="020B0604020202020204" charset="0"/>
-                <a:ea typeface="Open Sans 2" panose="020B0604020202020204" charset="0"/>
-                <a:cs typeface="Open Sans 2" panose="020B0604020202020204" charset="0"/>
-                <a:sym typeface="Inter"/>
-              </a:rPr>
-              <a:t>Autoria</a:t>
-            </a:r>
-            <a:r>
-              <a:rPr lang="en-US" sz="2400" spc="130" dirty="0">
-                <a:solidFill>
-                  <a:srgbClr val="000000"/>
-                </a:solidFill>
-                <a:latin typeface="Open Sans 2" panose="020B0604020202020204" charset="0"/>
-                <a:ea typeface="Open Sans 2" panose="020B0604020202020204" charset="0"/>
-                <a:cs typeface="Open Sans 2" panose="020B0604020202020204" charset="0"/>
-                <a:sym typeface="Inter"/>
-              </a:rPr>
-              <a:t> </a:t>
-            </a:r>
-            <a:r>
-              <a:rPr lang="en-US" sz="2400" spc="130" dirty="0" err="1">
-                <a:solidFill>
-                  <a:srgbClr val="000000"/>
-                </a:solidFill>
-                <a:latin typeface="Open Sans 2" panose="020B0604020202020204" charset="0"/>
-                <a:ea typeface="Open Sans 2" panose="020B0604020202020204" charset="0"/>
-                <a:cs typeface="Open Sans 2" panose="020B0604020202020204" charset="0"/>
-                <a:sym typeface="Inter"/>
-              </a:rPr>
-              <a:t>Própria</a:t>
-            </a:r>
-            <a:r>
-              <a:rPr lang="en-US" sz="2400" spc="130" dirty="0">
-                <a:solidFill>
-                  <a:srgbClr val="000000"/>
-                </a:solidFill>
-                <a:latin typeface="Open Sans 2" panose="020B0604020202020204" charset="0"/>
-                <a:ea typeface="Open Sans 2" panose="020B0604020202020204" charset="0"/>
-                <a:cs typeface="Open Sans 2" panose="020B0604020202020204" charset="0"/>
-                <a:sym typeface="Inter"/>
-              </a:rPr>
-              <a:t> (2026)</a:t>
-            </a:r>
-          </a:p>
-        </p:txBody>
-      </p:sp>
-      <p:sp>
-        <p:nvSpPr>
           <p:cNvPr id="48" name="TextBox 48"/>
           <p:cNvSpPr txBox="1"/>
           <p:nvPr/>
@@ -5768,7 +4705,7 @@
               </a:lnSpc>
             </a:pPr>
             <a:r>
-              <a:rPr lang="en-US" sz="4762" b="1" spc="179">
+              <a:rPr lang="en-US" sz="4762" b="1" spc="179" dirty="0">
                 <a:solidFill>
                   <a:srgbClr val="000000"/>
                 </a:solidFill>
@@ -5872,7 +4809,7 @@
         </p:nvSpPr>
         <p:spPr>
           <a:xfrm>
-            <a:off x="15966982" y="31719842"/>
+            <a:off x="15763201" y="31693742"/>
             <a:ext cx="11399871" cy="5492016"/>
           </a:xfrm>
           <a:prstGeom prst="rect">
@@ -5969,7 +4906,7 @@
               </a:lnSpc>
             </a:pPr>
             <a:r>
-              <a:rPr lang="pt-BR" sz="3200" dirty="0">
+              <a:rPr lang="pt-BR" sz="3430" dirty="0">
                 <a:solidFill>
                   <a:srgbClr val="000000"/>
                 </a:solidFill>
@@ -6007,8 +4944,8 @@
         </p:nvSpPr>
         <p:spPr>
           <a:xfrm>
-            <a:off x="1570063" y="31468346"/>
-            <a:ext cx="12962454" cy="6946197"/>
+            <a:off x="1545886" y="31595048"/>
+            <a:ext cx="12830149" cy="6381427"/>
           </a:xfrm>
           <a:prstGeom prst="rect">
             <a:avLst/>
@@ -6022,7 +4959,7 @@
           <a:p>
             <a:pPr algn="just"/>
             <a:r>
-              <a:rPr lang="pt-BR" sz="3450" dirty="0">
+              <a:rPr lang="pt-BR" sz="3430" dirty="0">
                 <a:latin typeface="Open Sans 2" panose="020B0604020202020204" charset="0"/>
                 <a:ea typeface="Open Sans 2" panose="020B0604020202020204" charset="0"/>
                 <a:cs typeface="Open Sans 2" panose="020B0604020202020204" charset="0"/>
@@ -6032,7 +4969,7 @@
           </a:p>
           <a:p>
             <a:pPr algn="just"/>
-            <a:endParaRPr lang="pt-BR" sz="3450" dirty="0">
+            <a:endParaRPr lang="pt-BR" sz="3430" dirty="0">
               <a:latin typeface="Open Sans 2" panose="020B0604020202020204" charset="0"/>
               <a:ea typeface="Open Sans 2" panose="020B0604020202020204" charset="0"/>
               <a:cs typeface="Open Sans 2" panose="020B0604020202020204" charset="0"/>
@@ -6044,7 +4981,7 @@
               <a:buChar char="•"/>
             </a:pPr>
             <a:r>
-              <a:rPr lang="pt-BR" sz="3450" dirty="0">
+              <a:rPr lang="pt-BR" sz="3430" dirty="0">
                 <a:latin typeface="Open Sans 2" panose="020B0604020202020204" charset="0"/>
                 <a:ea typeface="Open Sans 2" panose="020B0604020202020204" charset="0"/>
                 <a:cs typeface="Open Sans 2" panose="020B0604020202020204" charset="0"/>
@@ -6058,7 +4995,7 @@
               <a:buChar char="•"/>
             </a:pPr>
             <a:r>
-              <a:rPr lang="pt-BR" sz="3450" dirty="0">
+              <a:rPr lang="pt-BR" sz="3430" dirty="0">
                 <a:latin typeface="Open Sans 2" panose="020B0604020202020204" charset="0"/>
                 <a:ea typeface="Open Sans 2" panose="020B0604020202020204" charset="0"/>
                 <a:cs typeface="Open Sans 2" panose="020B0604020202020204" charset="0"/>
@@ -6066,7 +5003,7 @@
               <a:t>Interface Desktop: </a:t>
             </a:r>
             <a:r>
-              <a:rPr lang="pt-BR" sz="3450" dirty="0" err="1">
+              <a:rPr lang="pt-BR" sz="3430" dirty="0" err="1">
                 <a:latin typeface="Open Sans 2" panose="020B0604020202020204" charset="0"/>
                 <a:ea typeface="Open Sans 2" panose="020B0604020202020204" charset="0"/>
                 <a:cs typeface="Open Sans 2" panose="020B0604020202020204" charset="0"/>
@@ -6074,7 +5011,7 @@
               <a:t>WinForms</a:t>
             </a:r>
             <a:r>
-              <a:rPr lang="pt-BR" sz="3450" dirty="0">
+              <a:rPr lang="pt-BR" sz="3430" dirty="0">
                 <a:latin typeface="Open Sans 2" panose="020B0604020202020204" charset="0"/>
                 <a:ea typeface="Open Sans 2" panose="020B0604020202020204" charset="0"/>
                 <a:cs typeface="Open Sans 2" panose="020B0604020202020204" charset="0"/>
@@ -6088,28 +5025,12 @@
               <a:buChar char="•"/>
             </a:pPr>
             <a:r>
-              <a:rPr lang="pt-BR" sz="3450" dirty="0">
+              <a:rPr lang="pt-BR" sz="3430" dirty="0">
                 <a:latin typeface="Open Sans 2" panose="020B0604020202020204" charset="0"/>
                 <a:ea typeface="Open Sans 2" panose="020B0604020202020204" charset="0"/>
                 <a:cs typeface="Open Sans 2" panose="020B0604020202020204" charset="0"/>
               </a:rPr>
-              <a:t>Banco de Dados: </a:t>
-            </a:r>
-            <a:r>
-              <a:rPr lang="pt-BR" sz="3450" dirty="0" err="1">
-                <a:latin typeface="Open Sans 2" panose="020B0604020202020204" charset="0"/>
-                <a:ea typeface="Open Sans 2" panose="020B0604020202020204" charset="0"/>
-                <a:cs typeface="Open Sans 2" panose="020B0604020202020204" charset="0"/>
-              </a:rPr>
-              <a:t>SQLite</a:t>
-            </a:r>
-            <a:r>
-              <a:rPr lang="pt-BR" sz="3450" dirty="0">
-                <a:latin typeface="Open Sans 2" panose="020B0604020202020204" charset="0"/>
-                <a:ea typeface="Open Sans 2" panose="020B0604020202020204" charset="0"/>
-                <a:cs typeface="Open Sans 2" panose="020B0604020202020204" charset="0"/>
-              </a:rPr>
-              <a:t> — armazenamento de dados </a:t>
+              <a:t>Acesso a dados: ADO.NET — conexão com o banco (CRUD) </a:t>
             </a:r>
           </a:p>
           <a:p>
@@ -6118,12 +5039,12 @@
               <a:buChar char="•"/>
             </a:pPr>
             <a:r>
-              <a:rPr lang="pt-BR" sz="3450" dirty="0">
+              <a:rPr lang="pt-BR" sz="3430" dirty="0">
                 <a:latin typeface="Open Sans 2" panose="020B0604020202020204" charset="0"/>
                 <a:ea typeface="Open Sans 2" panose="020B0604020202020204" charset="0"/>
                 <a:cs typeface="Open Sans 2" panose="020B0604020202020204" charset="0"/>
               </a:rPr>
-              <a:t>Acesso a dados: ADO.NET — conexão com o banco (CRUD) </a:t>
+              <a:t>Modelagem: Draw.io — criação de diagramas </a:t>
             </a:r>
           </a:p>
           <a:p>
@@ -6132,12 +5053,28 @@
               <a:buChar char="•"/>
             </a:pPr>
             <a:r>
-              <a:rPr lang="pt-BR" sz="3450" dirty="0">
+              <a:rPr lang="pt-BR" sz="3430" dirty="0">
                 <a:latin typeface="Open Sans 2" panose="020B0604020202020204" charset="0"/>
                 <a:ea typeface="Open Sans 2" panose="020B0604020202020204" charset="0"/>
                 <a:cs typeface="Open Sans 2" panose="020B0604020202020204" charset="0"/>
               </a:rPr>
-              <a:t>Modelagem: Draw.io — criação de diagramas </a:t>
+              <a:t>Controle de Versão: </a:t>
+            </a:r>
+            <a:r>
+              <a:rPr lang="pt-BR" sz="3430" dirty="0" err="1">
+                <a:latin typeface="Open Sans 2" panose="020B0604020202020204" charset="0"/>
+                <a:ea typeface="Open Sans 2" panose="020B0604020202020204" charset="0"/>
+                <a:cs typeface="Open Sans 2" panose="020B0604020202020204" charset="0"/>
+              </a:rPr>
+              <a:t>Git</a:t>
+            </a:r>
+            <a:r>
+              <a:rPr lang="pt-BR" sz="3430" dirty="0">
+                <a:latin typeface="Open Sans 2" panose="020B0604020202020204" charset="0"/>
+                <a:ea typeface="Open Sans 2" panose="020B0604020202020204" charset="0"/>
+                <a:cs typeface="Open Sans 2" panose="020B0604020202020204" charset="0"/>
+              </a:rPr>
+              <a:t> (GitHub) — versionamento do código </a:t>
             </a:r>
           </a:p>
           <a:p>
@@ -6146,53 +5083,23 @@
               <a:buChar char="•"/>
             </a:pPr>
             <a:r>
-              <a:rPr lang="pt-BR" sz="3450" dirty="0">
+              <a:rPr lang="pt-BR" sz="3430" dirty="0">
                 <a:latin typeface="Open Sans 2" panose="020B0604020202020204" charset="0"/>
                 <a:ea typeface="Open Sans 2" panose="020B0604020202020204" charset="0"/>
                 <a:cs typeface="Open Sans 2" panose="020B0604020202020204" charset="0"/>
               </a:rPr>
-              <a:t>Controle de Versão: </a:t>
-            </a:r>
-            <a:r>
-              <a:rPr lang="pt-BR" sz="3450" dirty="0" err="1">
+              <a:t>Prototipação de interface: </a:t>
+            </a:r>
+            <a:r>
+              <a:rPr lang="pt-BR" sz="3430" dirty="0" err="1">
                 <a:latin typeface="Open Sans 2" panose="020B0604020202020204" charset="0"/>
                 <a:ea typeface="Open Sans 2" panose="020B0604020202020204" charset="0"/>
                 <a:cs typeface="Open Sans 2" panose="020B0604020202020204" charset="0"/>
               </a:rPr>
-              <a:t>Git</a:t>
-            </a:r>
-            <a:r>
-              <a:rPr lang="pt-BR" sz="3450" dirty="0">
-                <a:latin typeface="Open Sans 2" panose="020B0604020202020204" charset="0"/>
-                <a:ea typeface="Open Sans 2" panose="020B0604020202020204" charset="0"/>
-                <a:cs typeface="Open Sans 2" panose="020B0604020202020204" charset="0"/>
-              </a:rPr>
-              <a:t> (GitHub) — versionamento do código </a:t>
-            </a:r>
-          </a:p>
-          <a:p>
-            <a:pPr marL="457200" indent="-457200">
-              <a:buFont typeface="Arial" panose="020B0604020202020204" pitchFamily="34" charset="0"/>
-              <a:buChar char="•"/>
-            </a:pPr>
-            <a:r>
-              <a:rPr lang="pt-BR" sz="3450" dirty="0">
-                <a:latin typeface="Open Sans 2" panose="020B0604020202020204" charset="0"/>
-                <a:ea typeface="Open Sans 2" panose="020B0604020202020204" charset="0"/>
-                <a:cs typeface="Open Sans 2" panose="020B0604020202020204" charset="0"/>
-              </a:rPr>
-              <a:t>Prototipação de interface: </a:t>
-            </a:r>
-            <a:r>
-              <a:rPr lang="pt-BR" sz="3450" dirty="0" err="1">
-                <a:latin typeface="Open Sans 2" panose="020B0604020202020204" charset="0"/>
-                <a:ea typeface="Open Sans 2" panose="020B0604020202020204" charset="0"/>
-                <a:cs typeface="Open Sans 2" panose="020B0604020202020204" charset="0"/>
-              </a:rPr>
               <a:t>Canva</a:t>
             </a:r>
             <a:r>
-              <a:rPr lang="pt-BR" sz="3450" dirty="0">
+              <a:rPr lang="pt-BR" sz="3430" dirty="0">
                 <a:latin typeface="Open Sans 2" panose="020B0604020202020204" charset="0"/>
                 <a:ea typeface="Open Sans 2" panose="020B0604020202020204" charset="0"/>
                 <a:cs typeface="Open Sans 2" panose="020B0604020202020204" charset="0"/>
@@ -8296,14 +7203,131 @@
       </p:sp>
       <p:sp>
         <p:nvSpPr>
-          <p:cNvPr id="57" name="TextBox 57"/>
+          <p:cNvPr id="59" name="Freeform 13">
+            <a:extLst>
+              <a:ext uri="{FF2B5EF4-FFF2-40B4-BE49-F238E27FC236}">
+                <a16:creationId xmlns:a16="http://schemas.microsoft.com/office/drawing/2014/main" id="{81178D3D-C98C-9D1F-24AA-29D977CB505B}"/>
+              </a:ext>
+            </a:extLst>
+          </p:cNvPr>
+          <p:cNvSpPr/>
+          <p:nvPr/>
+        </p:nvSpPr>
+        <p:spPr>
+          <a:xfrm>
+            <a:off x="20765999" y="24257018"/>
+            <a:ext cx="6705185" cy="5233817"/>
+          </a:xfrm>
+          <a:custGeom>
+            <a:avLst/>
+            <a:gdLst/>
+            <a:ahLst/>
+            <a:cxnLst/>
+            <a:rect l="l" t="t" r="r" b="b"/>
+            <a:pathLst>
+              <a:path w="5792928" h="4654791">
+                <a:moveTo>
+                  <a:pt x="0" y="0"/>
+                </a:moveTo>
+                <a:lnTo>
+                  <a:pt x="5792928" y="0"/>
+                </a:lnTo>
+                <a:lnTo>
+                  <a:pt x="5792928" y="4654791"/>
+                </a:lnTo>
+                <a:lnTo>
+                  <a:pt x="0" y="4654791"/>
+                </a:lnTo>
+                <a:lnTo>
+                  <a:pt x="0" y="0"/>
+                </a:lnTo>
+                <a:close/>
+              </a:path>
+            </a:pathLst>
+          </a:custGeom>
+          <a:blipFill>
+            <a:blip r:embed="rId6"/>
+            <a:stretch>
+              <a:fillRect l="-5904" r="-935"/>
+            </a:stretch>
+          </a:blipFill>
+        </p:spPr>
+        <p:txBody>
+          <a:bodyPr/>
+          <a:lstStyle/>
+          <a:p>
+            <a:endParaRPr lang="pt-BR"/>
+          </a:p>
+        </p:txBody>
+      </p:sp>
+      <p:grpSp>
+        <p:nvGrpSpPr>
+          <p:cNvPr id="61" name="Group 24">
+            <a:extLst>
+              <a:ext uri="{FF2B5EF4-FFF2-40B4-BE49-F238E27FC236}">
+                <a16:creationId xmlns:a16="http://schemas.microsoft.com/office/drawing/2014/main" id="{D8092A12-D2AC-B6F8-4D9D-3E89BFEE2AA0}"/>
+              </a:ext>
+            </a:extLst>
+          </p:cNvPr>
+          <p:cNvGrpSpPr/>
+          <p:nvPr/>
+        </p:nvGrpSpPr>
+        <p:grpSpPr>
+          <a:xfrm>
+            <a:off x="21158989" y="24486020"/>
+            <a:ext cx="5920068" cy="2954220"/>
+            <a:chOff x="0" y="0"/>
+            <a:chExt cx="6766791" cy="3801912"/>
+          </a:xfrm>
+        </p:grpSpPr>
+        <p:pic>
+          <p:nvPicPr>
+            <p:cNvPr id="62" name="Picture 25">
+              <a:extLst>
+                <a:ext uri="{FF2B5EF4-FFF2-40B4-BE49-F238E27FC236}">
+                  <a16:creationId xmlns:a16="http://schemas.microsoft.com/office/drawing/2014/main" id="{F80571FD-E5E7-AF4D-1D03-F158AB3DC600}"/>
+                </a:ext>
+              </a:extLst>
+            </p:cNvPr>
+            <p:cNvPicPr>
+              <a:picLocks noChangeAspect="1"/>
+            </p:cNvPicPr>
+            <p:nvPr/>
+          </p:nvPicPr>
+          <p:blipFill>
+            <a:blip r:embed="rId7"/>
+            <a:srcRect t="21466" b="33664"/>
+            <a:stretch>
+              <a:fillRect/>
+            </a:stretch>
+          </p:blipFill>
+          <p:spPr>
+            <a:xfrm>
+              <a:off x="0" y="0"/>
+              <a:ext cx="6766791" cy="3801912"/>
+            </a:xfrm>
+            <a:prstGeom prst="rect">
+              <a:avLst/>
+            </a:prstGeom>
+          </p:spPr>
+        </p:pic>
+      </p:grpSp>
+      <p:sp>
+        <p:nvSpPr>
+          <p:cNvPr id="47" name="TextBox 54">
+            <a:extLst>
+              <a:ext uri="{FF2B5EF4-FFF2-40B4-BE49-F238E27FC236}">
+                <a16:creationId xmlns:a16="http://schemas.microsoft.com/office/drawing/2014/main" id="{55739D15-92D4-6334-8CBE-0F95CF8EDB47}"/>
+              </a:ext>
+            </a:extLst>
+          </p:cNvPr>
           <p:cNvSpPr txBox="1"/>
           <p:nvPr/>
         </p:nvSpPr>
         <p:spPr>
           <a:xfrm>
-            <a:off x="15938204" y="10860570"/>
-            <a:ext cx="11263377" cy="5806205"/>
+            <a:off x="15721719" y="10779162"/>
+            <a:ext cx="11482836" cy="4884094"/>
           </a:xfrm>
           <a:prstGeom prst="rect">
             <a:avLst/>
@@ -8315,68 +7339,824 @@
           </a:bodyPr>
           <a:lstStyle/>
           <a:p>
-            <a:pPr algn="just"/>
-            <a:r>
-              <a:rPr lang="pt-BR" sz="3430" dirty="0">
-                <a:latin typeface="Open Sans 2" panose="020B0604020202020204" charset="0"/>
-                <a:ea typeface="Open Sans 2" panose="020B0604020202020204" charset="0"/>
-                <a:cs typeface="Open Sans 2" panose="020B0604020202020204" charset="0"/>
-              </a:rPr>
-              <a:t>O sistema desenvolvido apresentou resultados positivos durante a simulação de uso por instituições de ensino, demonstrando eficiência no controle de acessos, validação de </a:t>
-            </a:r>
-            <a:r>
-              <a:rPr lang="pt-BR" sz="3430" dirty="0" err="1">
-                <a:latin typeface="Open Sans 2" panose="020B0604020202020204" charset="0"/>
-                <a:ea typeface="Open Sans 2" panose="020B0604020202020204" charset="0"/>
-                <a:cs typeface="Open Sans 2" panose="020B0604020202020204" charset="0"/>
-              </a:rPr>
-              <a:t>IPs</a:t>
-            </a:r>
-            <a:r>
-              <a:rPr lang="pt-BR" sz="3430" dirty="0">
-                <a:latin typeface="Open Sans 2" panose="020B0604020202020204" charset="0"/>
-                <a:ea typeface="Open Sans 2" panose="020B0604020202020204" charset="0"/>
-                <a:cs typeface="Open Sans 2" panose="020B0604020202020204" charset="0"/>
-              </a:rPr>
-              <a:t> e gerenciamento de pacotes de jogos educacionais. Ao longo dos testes, foi possível verificar uma redução significativa de acessos não autorizados, graças ao mecanismo de validação por IP implementado na aplicação. Além disso, o sistema se mostrou eficaz no controle do limite mensal de acessos por escola, garantindo que os contratos estabelecidos fossem respeitados de forma automática.</a:t>
+            <a:pPr algn="just">
+              <a:lnSpc>
+                <a:spcPts val="4802"/>
+              </a:lnSpc>
+            </a:pPr>
+            <a:r>
+              <a:rPr lang="en-US" sz="3430" dirty="0">
+                <a:solidFill>
+                  <a:srgbClr val="000000"/>
+                </a:solidFill>
+                <a:latin typeface="Open Sans 2"/>
+                <a:ea typeface="Open Sans 2"/>
+                <a:cs typeface="Open Sans 2"/>
+                <a:sym typeface="Open Sans 2"/>
+              </a:rPr>
+              <a:t>O Sistema </a:t>
+            </a:r>
+            <a:r>
+              <a:rPr lang="en-US" sz="3430" dirty="0" err="1">
+                <a:solidFill>
+                  <a:srgbClr val="000000"/>
+                </a:solidFill>
+                <a:latin typeface="Open Sans 2"/>
+                <a:ea typeface="Open Sans 2"/>
+                <a:cs typeface="Open Sans 2"/>
+                <a:sym typeface="Open Sans 2"/>
+              </a:rPr>
+              <a:t>desenvolvido</a:t>
+            </a:r>
+            <a:r>
+              <a:rPr lang="en-US" sz="3430" dirty="0">
+                <a:solidFill>
+                  <a:srgbClr val="000000"/>
+                </a:solidFill>
+                <a:latin typeface="Open Sans 2"/>
+                <a:ea typeface="Open Sans 2"/>
+                <a:cs typeface="Open Sans 2"/>
+                <a:sym typeface="Open Sans 2"/>
+              </a:rPr>
+              <a:t> </a:t>
+            </a:r>
+            <a:r>
+              <a:rPr lang="en-US" sz="3430" dirty="0" err="1">
+                <a:solidFill>
+                  <a:srgbClr val="000000"/>
+                </a:solidFill>
+                <a:latin typeface="Open Sans 2"/>
+                <a:ea typeface="Open Sans 2"/>
+                <a:cs typeface="Open Sans 2"/>
+                <a:sym typeface="Open Sans 2"/>
+              </a:rPr>
+              <a:t>apresentou</a:t>
+            </a:r>
+            <a:r>
+              <a:rPr lang="en-US" sz="3430" dirty="0">
+                <a:solidFill>
+                  <a:srgbClr val="000000"/>
+                </a:solidFill>
+                <a:latin typeface="Open Sans 2"/>
+                <a:ea typeface="Open Sans 2"/>
+                <a:cs typeface="Open Sans 2"/>
+                <a:sym typeface="Open Sans 2"/>
+              </a:rPr>
+              <a:t> </a:t>
+            </a:r>
+            <a:r>
+              <a:rPr lang="en-US" sz="3430" dirty="0" err="1">
+                <a:solidFill>
+                  <a:srgbClr val="000000"/>
+                </a:solidFill>
+                <a:latin typeface="Open Sans 2"/>
+                <a:ea typeface="Open Sans 2"/>
+                <a:cs typeface="Open Sans 2"/>
+                <a:sym typeface="Open Sans 2"/>
+              </a:rPr>
+              <a:t>resultados</a:t>
+            </a:r>
+            <a:r>
+              <a:rPr lang="en-US" sz="3430" dirty="0">
+                <a:solidFill>
+                  <a:srgbClr val="000000"/>
+                </a:solidFill>
+                <a:latin typeface="Open Sans 2"/>
+                <a:ea typeface="Open Sans 2"/>
+                <a:cs typeface="Open Sans 2"/>
+                <a:sym typeface="Open Sans 2"/>
+              </a:rPr>
+              <a:t> </a:t>
+            </a:r>
+            <a:r>
+              <a:rPr lang="en-US" sz="3430" dirty="0" err="1">
+                <a:solidFill>
+                  <a:srgbClr val="000000"/>
+                </a:solidFill>
+                <a:latin typeface="Open Sans 2"/>
+                <a:ea typeface="Open Sans 2"/>
+                <a:cs typeface="Open Sans 2"/>
+                <a:sym typeface="Open Sans 2"/>
+              </a:rPr>
+              <a:t>positivos</a:t>
+            </a:r>
+            <a:r>
+              <a:rPr lang="en-US" sz="3430" dirty="0">
+                <a:solidFill>
+                  <a:srgbClr val="000000"/>
+                </a:solidFill>
+                <a:latin typeface="Open Sans 2"/>
+                <a:ea typeface="Open Sans 2"/>
+                <a:cs typeface="Open Sans 2"/>
+                <a:sym typeface="Open Sans 2"/>
+              </a:rPr>
+              <a:t> </a:t>
+            </a:r>
+            <a:r>
+              <a:rPr lang="en-US" sz="3430" dirty="0" err="1">
+                <a:solidFill>
+                  <a:srgbClr val="000000"/>
+                </a:solidFill>
+                <a:latin typeface="Open Sans 2"/>
+                <a:ea typeface="Open Sans 2"/>
+                <a:cs typeface="Open Sans 2"/>
+                <a:sym typeface="Open Sans 2"/>
+              </a:rPr>
+              <a:t>durante</a:t>
+            </a:r>
+            <a:r>
+              <a:rPr lang="en-US" sz="3430" dirty="0">
+                <a:solidFill>
+                  <a:srgbClr val="000000"/>
+                </a:solidFill>
+                <a:latin typeface="Open Sans 2"/>
+                <a:ea typeface="Open Sans 2"/>
+                <a:cs typeface="Open Sans 2"/>
+                <a:sym typeface="Open Sans 2"/>
+              </a:rPr>
+              <a:t> </a:t>
+            </a:r>
+            <a:r>
+              <a:rPr lang="en-US" sz="3430" dirty="0" err="1">
+                <a:solidFill>
+                  <a:srgbClr val="000000"/>
+                </a:solidFill>
+                <a:latin typeface="Open Sans 2"/>
+                <a:ea typeface="Open Sans 2"/>
+                <a:cs typeface="Open Sans 2"/>
+                <a:sym typeface="Open Sans 2"/>
+              </a:rPr>
+              <a:t>os</a:t>
+            </a:r>
+            <a:r>
+              <a:rPr lang="en-US" sz="3430" dirty="0">
+                <a:solidFill>
+                  <a:srgbClr val="000000"/>
+                </a:solidFill>
+                <a:latin typeface="Open Sans 2"/>
+                <a:ea typeface="Open Sans 2"/>
+                <a:cs typeface="Open Sans 2"/>
+                <a:sym typeface="Open Sans 2"/>
+              </a:rPr>
+              <a:t> testes </a:t>
+            </a:r>
+            <a:r>
+              <a:rPr lang="en-US" sz="3430" dirty="0" err="1">
+                <a:solidFill>
+                  <a:srgbClr val="000000"/>
+                </a:solidFill>
+                <a:latin typeface="Open Sans 2"/>
+                <a:ea typeface="Open Sans 2"/>
+                <a:cs typeface="Open Sans 2"/>
+                <a:sym typeface="Open Sans 2"/>
+              </a:rPr>
+              <a:t>realizados</a:t>
+            </a:r>
+            <a:r>
+              <a:rPr lang="en-US" sz="3430" dirty="0">
+                <a:solidFill>
+                  <a:srgbClr val="000000"/>
+                </a:solidFill>
+                <a:latin typeface="Open Sans 2"/>
+                <a:ea typeface="Open Sans 2"/>
+                <a:cs typeface="Open Sans 2"/>
+                <a:sym typeface="Open Sans 2"/>
+              </a:rPr>
+              <a:t>. A </a:t>
+            </a:r>
+            <a:r>
+              <a:rPr lang="en-US" sz="3430" dirty="0" err="1">
+                <a:solidFill>
+                  <a:srgbClr val="000000"/>
+                </a:solidFill>
+                <a:latin typeface="Open Sans 2"/>
+                <a:ea typeface="Open Sans 2"/>
+                <a:cs typeface="Open Sans 2"/>
+                <a:sym typeface="Open Sans 2"/>
+              </a:rPr>
+              <a:t>aplicação</a:t>
+            </a:r>
+            <a:r>
+              <a:rPr lang="en-US" sz="3430" dirty="0">
+                <a:solidFill>
+                  <a:srgbClr val="000000"/>
+                </a:solidFill>
+                <a:latin typeface="Open Sans 2"/>
+                <a:ea typeface="Open Sans 2"/>
+                <a:cs typeface="Open Sans 2"/>
+                <a:sym typeface="Open Sans 2"/>
+              </a:rPr>
+              <a:t> </a:t>
+            </a:r>
+            <a:r>
+              <a:rPr lang="en-US" sz="3430" dirty="0" err="1">
+                <a:solidFill>
+                  <a:srgbClr val="000000"/>
+                </a:solidFill>
+                <a:latin typeface="Open Sans 2"/>
+                <a:ea typeface="Open Sans 2"/>
+                <a:cs typeface="Open Sans 2"/>
+                <a:sym typeface="Open Sans 2"/>
+              </a:rPr>
+              <a:t>permitiu</a:t>
+            </a:r>
+            <a:r>
+              <a:rPr lang="en-US" sz="3430" dirty="0">
+                <a:solidFill>
+                  <a:srgbClr val="000000"/>
+                </a:solidFill>
+                <a:latin typeface="Open Sans 2"/>
+                <a:ea typeface="Open Sans 2"/>
+                <a:cs typeface="Open Sans 2"/>
+                <a:sym typeface="Open Sans 2"/>
+              </a:rPr>
+              <a:t> o </a:t>
+            </a:r>
+            <a:r>
+              <a:rPr lang="en-US" sz="3430" dirty="0" err="1">
+                <a:solidFill>
+                  <a:srgbClr val="000000"/>
+                </a:solidFill>
+                <a:latin typeface="Open Sans 2"/>
+                <a:ea typeface="Open Sans 2"/>
+                <a:cs typeface="Open Sans 2"/>
+                <a:sym typeface="Open Sans 2"/>
+              </a:rPr>
+              <a:t>controle</a:t>
+            </a:r>
+            <a:r>
+              <a:rPr lang="en-US" sz="3430" dirty="0">
+                <a:solidFill>
+                  <a:srgbClr val="000000"/>
+                </a:solidFill>
+                <a:latin typeface="Open Sans 2"/>
+                <a:ea typeface="Open Sans 2"/>
+                <a:cs typeface="Open Sans 2"/>
+                <a:sym typeface="Open Sans 2"/>
+              </a:rPr>
+              <a:t> de </a:t>
+            </a:r>
+            <a:r>
+              <a:rPr lang="en-US" sz="3430" dirty="0" err="1">
+                <a:solidFill>
+                  <a:srgbClr val="000000"/>
+                </a:solidFill>
+                <a:latin typeface="Open Sans 2"/>
+                <a:ea typeface="Open Sans 2"/>
+                <a:cs typeface="Open Sans 2"/>
+                <a:sym typeface="Open Sans 2"/>
+              </a:rPr>
+              <a:t>acessos</a:t>
+            </a:r>
+            <a:r>
+              <a:rPr lang="en-US" sz="3430" dirty="0">
+                <a:solidFill>
+                  <a:srgbClr val="000000"/>
+                </a:solidFill>
+                <a:latin typeface="Open Sans 2"/>
+                <a:ea typeface="Open Sans 2"/>
+                <a:cs typeface="Open Sans 2"/>
+                <a:sym typeface="Open Sans 2"/>
+              </a:rPr>
+              <a:t>, </a:t>
+            </a:r>
+            <a:r>
+              <a:rPr lang="en-US" sz="3430" dirty="0" err="1">
+                <a:solidFill>
+                  <a:srgbClr val="000000"/>
+                </a:solidFill>
+                <a:latin typeface="Open Sans 2"/>
+                <a:ea typeface="Open Sans 2"/>
+                <a:cs typeface="Open Sans 2"/>
+                <a:sym typeface="Open Sans 2"/>
+              </a:rPr>
+              <a:t>validação</a:t>
+            </a:r>
+            <a:r>
+              <a:rPr lang="en-US" sz="3430" dirty="0">
+                <a:solidFill>
+                  <a:srgbClr val="000000"/>
+                </a:solidFill>
+                <a:latin typeface="Open Sans 2"/>
+                <a:ea typeface="Open Sans 2"/>
+                <a:cs typeface="Open Sans 2"/>
+                <a:sym typeface="Open Sans 2"/>
+              </a:rPr>
+              <a:t> de Ips </a:t>
+            </a:r>
+            <a:r>
+              <a:rPr lang="en-US" sz="3430" dirty="0" err="1">
+                <a:solidFill>
+                  <a:srgbClr val="000000"/>
+                </a:solidFill>
+                <a:latin typeface="Open Sans 2"/>
+                <a:ea typeface="Open Sans 2"/>
+                <a:cs typeface="Open Sans 2"/>
+                <a:sym typeface="Open Sans 2"/>
+              </a:rPr>
+              <a:t>autorizados</a:t>
+            </a:r>
+            <a:r>
+              <a:rPr lang="en-US" sz="3430" dirty="0">
+                <a:solidFill>
+                  <a:srgbClr val="000000"/>
+                </a:solidFill>
+                <a:latin typeface="Open Sans 2"/>
+                <a:ea typeface="Open Sans 2"/>
+                <a:cs typeface="Open Sans 2"/>
+                <a:sym typeface="Open Sans 2"/>
+              </a:rPr>
+              <a:t> e </a:t>
+            </a:r>
+            <a:r>
+              <a:rPr lang="en-US" sz="3430" dirty="0" err="1">
+                <a:solidFill>
+                  <a:srgbClr val="000000"/>
+                </a:solidFill>
+                <a:latin typeface="Open Sans 2"/>
+                <a:ea typeface="Open Sans 2"/>
+                <a:cs typeface="Open Sans 2"/>
+                <a:sym typeface="Open Sans 2"/>
+              </a:rPr>
+              <a:t>gerenciamento</a:t>
+            </a:r>
+            <a:r>
+              <a:rPr lang="en-US" sz="3430" dirty="0">
+                <a:solidFill>
+                  <a:srgbClr val="000000"/>
+                </a:solidFill>
+                <a:latin typeface="Open Sans 2"/>
+                <a:ea typeface="Open Sans 2"/>
+                <a:cs typeface="Open Sans 2"/>
+                <a:sym typeface="Open Sans 2"/>
+              </a:rPr>
+              <a:t> de </a:t>
+            </a:r>
+            <a:r>
+              <a:rPr lang="en-US" sz="3430" dirty="0" err="1">
+                <a:solidFill>
+                  <a:srgbClr val="000000"/>
+                </a:solidFill>
+                <a:latin typeface="Open Sans 2"/>
+                <a:ea typeface="Open Sans 2"/>
+                <a:cs typeface="Open Sans 2"/>
+                <a:sym typeface="Open Sans 2"/>
+              </a:rPr>
+              <a:t>pacotes</a:t>
+            </a:r>
+            <a:r>
+              <a:rPr lang="en-US" sz="3430" dirty="0">
+                <a:solidFill>
+                  <a:srgbClr val="000000"/>
+                </a:solidFill>
+                <a:latin typeface="Open Sans 2"/>
+                <a:ea typeface="Open Sans 2"/>
+                <a:cs typeface="Open Sans 2"/>
+                <a:sym typeface="Open Sans 2"/>
+              </a:rPr>
+              <a:t> </a:t>
+            </a:r>
+            <a:r>
+              <a:rPr lang="en-US" sz="3430" dirty="0" err="1">
+                <a:solidFill>
+                  <a:srgbClr val="000000"/>
+                </a:solidFill>
+                <a:latin typeface="Open Sans 2"/>
+                <a:ea typeface="Open Sans 2"/>
+                <a:cs typeface="Open Sans 2"/>
+                <a:sym typeface="Open Sans 2"/>
+              </a:rPr>
+              <a:t>educacionais</a:t>
+            </a:r>
+            <a:r>
+              <a:rPr lang="en-US" sz="3430" dirty="0">
+                <a:solidFill>
+                  <a:srgbClr val="000000"/>
+                </a:solidFill>
+                <a:latin typeface="Open Sans 2"/>
+                <a:ea typeface="Open Sans 2"/>
+                <a:cs typeface="Open Sans 2"/>
+                <a:sym typeface="Open Sans 2"/>
+              </a:rPr>
+              <a:t> de forma </a:t>
+            </a:r>
+            <a:r>
+              <a:rPr lang="en-US" sz="3430" dirty="0" err="1">
+                <a:solidFill>
+                  <a:srgbClr val="000000"/>
+                </a:solidFill>
+                <a:latin typeface="Open Sans 2"/>
+                <a:ea typeface="Open Sans 2"/>
+                <a:cs typeface="Open Sans 2"/>
+                <a:sym typeface="Open Sans 2"/>
+              </a:rPr>
+              <a:t>eficiente</a:t>
+            </a:r>
+            <a:r>
+              <a:rPr lang="en-US" sz="3430" dirty="0">
+                <a:solidFill>
+                  <a:srgbClr val="000000"/>
+                </a:solidFill>
+                <a:latin typeface="Open Sans 2"/>
+                <a:ea typeface="Open Sans 2"/>
+                <a:cs typeface="Open Sans 2"/>
+                <a:sym typeface="Open Sans 2"/>
+              </a:rPr>
+              <a:t>. </a:t>
+            </a:r>
+            <a:r>
+              <a:rPr lang="en-US" sz="3430" dirty="0" err="1">
+                <a:solidFill>
+                  <a:srgbClr val="000000"/>
+                </a:solidFill>
+                <a:latin typeface="Open Sans 2"/>
+                <a:ea typeface="Open Sans 2"/>
+                <a:cs typeface="Open Sans 2"/>
+                <a:sym typeface="Open Sans 2"/>
+              </a:rPr>
+              <a:t>Além</a:t>
+            </a:r>
+            <a:r>
+              <a:rPr lang="en-US" sz="3430" dirty="0">
+                <a:solidFill>
+                  <a:srgbClr val="000000"/>
+                </a:solidFill>
+                <a:latin typeface="Open Sans 2"/>
+                <a:ea typeface="Open Sans 2"/>
+                <a:cs typeface="Open Sans 2"/>
+                <a:sym typeface="Open Sans 2"/>
+              </a:rPr>
+              <a:t> </a:t>
+            </a:r>
+            <a:r>
+              <a:rPr lang="en-US" sz="3430" dirty="0" err="1">
+                <a:solidFill>
+                  <a:srgbClr val="000000"/>
+                </a:solidFill>
+                <a:latin typeface="Open Sans 2"/>
+                <a:ea typeface="Open Sans 2"/>
+                <a:cs typeface="Open Sans 2"/>
+                <a:sym typeface="Open Sans 2"/>
+              </a:rPr>
+              <a:t>disso</a:t>
+            </a:r>
+            <a:r>
+              <a:rPr lang="en-US" sz="3430" dirty="0">
+                <a:solidFill>
+                  <a:srgbClr val="000000"/>
+                </a:solidFill>
+                <a:latin typeface="Open Sans 2"/>
+                <a:ea typeface="Open Sans 2"/>
+                <a:cs typeface="Open Sans 2"/>
+                <a:sym typeface="Open Sans 2"/>
+              </a:rPr>
+              <a:t>, as </a:t>
+            </a:r>
+            <a:r>
+              <a:rPr lang="en-US" sz="3430" dirty="0" err="1">
+                <a:solidFill>
+                  <a:srgbClr val="000000"/>
+                </a:solidFill>
+                <a:latin typeface="Open Sans 2"/>
+                <a:ea typeface="Open Sans 2"/>
+                <a:cs typeface="Open Sans 2"/>
+                <a:sym typeface="Open Sans 2"/>
+              </a:rPr>
+              <a:t>telas</a:t>
+            </a:r>
+            <a:r>
+              <a:rPr lang="en-US" sz="3430" dirty="0">
+                <a:solidFill>
+                  <a:srgbClr val="000000"/>
+                </a:solidFill>
+                <a:latin typeface="Open Sans 2"/>
+                <a:ea typeface="Open Sans 2"/>
+                <a:cs typeface="Open Sans 2"/>
+                <a:sym typeface="Open Sans 2"/>
+              </a:rPr>
+              <a:t> </a:t>
+            </a:r>
+            <a:r>
+              <a:rPr lang="en-US" sz="3430" dirty="0" err="1">
+                <a:solidFill>
+                  <a:srgbClr val="000000"/>
+                </a:solidFill>
+                <a:latin typeface="Open Sans 2"/>
+                <a:ea typeface="Open Sans 2"/>
+                <a:cs typeface="Open Sans 2"/>
+                <a:sym typeface="Open Sans 2"/>
+              </a:rPr>
+              <a:t>desenvolvidas</a:t>
+            </a:r>
+            <a:r>
+              <a:rPr lang="en-US" sz="3430" dirty="0">
+                <a:solidFill>
+                  <a:srgbClr val="000000"/>
+                </a:solidFill>
+                <a:latin typeface="Open Sans 2"/>
+                <a:ea typeface="Open Sans 2"/>
+                <a:cs typeface="Open Sans 2"/>
+                <a:sym typeface="Open Sans 2"/>
+              </a:rPr>
+              <a:t> </a:t>
+            </a:r>
+            <a:r>
+              <a:rPr lang="en-US" sz="3430" dirty="0" err="1">
+                <a:solidFill>
+                  <a:srgbClr val="000000"/>
+                </a:solidFill>
+                <a:latin typeface="Open Sans 2"/>
+                <a:ea typeface="Open Sans 2"/>
+                <a:cs typeface="Open Sans 2"/>
+                <a:sym typeface="Open Sans 2"/>
+              </a:rPr>
+              <a:t>possibilitam</a:t>
+            </a:r>
+            <a:r>
+              <a:rPr lang="en-US" sz="3430" dirty="0">
+                <a:solidFill>
+                  <a:srgbClr val="000000"/>
+                </a:solidFill>
+                <a:latin typeface="Open Sans 2"/>
+                <a:ea typeface="Open Sans 2"/>
+                <a:cs typeface="Open Sans 2"/>
+                <a:sym typeface="Open Sans 2"/>
+              </a:rPr>
+              <a:t> </a:t>
+            </a:r>
+            <a:r>
+              <a:rPr lang="en-US" sz="3430" dirty="0" err="1">
+                <a:solidFill>
+                  <a:srgbClr val="000000"/>
+                </a:solidFill>
+                <a:latin typeface="Open Sans 2"/>
+                <a:ea typeface="Open Sans 2"/>
+                <a:cs typeface="Open Sans 2"/>
+                <a:sym typeface="Open Sans 2"/>
+              </a:rPr>
+              <a:t>uma</a:t>
+            </a:r>
+            <a:r>
+              <a:rPr lang="en-US" sz="3430" dirty="0">
+                <a:solidFill>
+                  <a:srgbClr val="000000"/>
+                </a:solidFill>
+                <a:latin typeface="Open Sans 2"/>
+                <a:ea typeface="Open Sans 2"/>
+                <a:cs typeface="Open Sans 2"/>
+                <a:sym typeface="Open Sans 2"/>
+              </a:rPr>
+              <a:t> </a:t>
+            </a:r>
+            <a:r>
+              <a:rPr lang="en-US" sz="3430" dirty="0" err="1">
+                <a:solidFill>
+                  <a:srgbClr val="000000"/>
+                </a:solidFill>
+                <a:latin typeface="Open Sans 2"/>
+                <a:ea typeface="Open Sans 2"/>
+                <a:cs typeface="Open Sans 2"/>
+                <a:sym typeface="Open Sans 2"/>
+              </a:rPr>
+              <a:t>navegação</a:t>
+            </a:r>
+            <a:r>
+              <a:rPr lang="en-US" sz="3430" dirty="0">
+                <a:solidFill>
+                  <a:srgbClr val="000000"/>
+                </a:solidFill>
+                <a:latin typeface="Open Sans 2"/>
+                <a:ea typeface="Open Sans 2"/>
+                <a:cs typeface="Open Sans 2"/>
+                <a:sym typeface="Open Sans 2"/>
+              </a:rPr>
+              <a:t> simples e </a:t>
+            </a:r>
+            <a:r>
+              <a:rPr lang="en-US" sz="3430" dirty="0" err="1">
+                <a:solidFill>
+                  <a:srgbClr val="000000"/>
+                </a:solidFill>
+                <a:latin typeface="Open Sans 2"/>
+                <a:ea typeface="Open Sans 2"/>
+                <a:cs typeface="Open Sans 2"/>
+                <a:sym typeface="Open Sans 2"/>
+              </a:rPr>
+              <a:t>intuitiva</a:t>
+            </a:r>
+            <a:r>
+              <a:rPr lang="en-US" sz="3430" dirty="0">
+                <a:solidFill>
+                  <a:srgbClr val="000000"/>
+                </a:solidFill>
+                <a:latin typeface="Open Sans 2"/>
+                <a:ea typeface="Open Sans 2"/>
+                <a:cs typeface="Open Sans 2"/>
+                <a:sym typeface="Open Sans 2"/>
+              </a:rPr>
+              <a:t>, </a:t>
+            </a:r>
+            <a:r>
+              <a:rPr lang="en-US" sz="3430" dirty="0" err="1">
+                <a:solidFill>
+                  <a:srgbClr val="000000"/>
+                </a:solidFill>
+                <a:latin typeface="Open Sans 2"/>
+                <a:ea typeface="Open Sans 2"/>
+                <a:cs typeface="Open Sans 2"/>
+                <a:sym typeface="Open Sans 2"/>
+              </a:rPr>
+              <a:t>facilitando</a:t>
+            </a:r>
+            <a:r>
+              <a:rPr lang="en-US" sz="3430" dirty="0">
+                <a:solidFill>
+                  <a:srgbClr val="000000"/>
+                </a:solidFill>
+                <a:latin typeface="Open Sans 2"/>
+                <a:ea typeface="Open Sans 2"/>
+                <a:cs typeface="Open Sans 2"/>
+                <a:sym typeface="Open Sans 2"/>
+              </a:rPr>
+              <a:t> o </a:t>
+            </a:r>
+            <a:r>
+              <a:rPr lang="en-US" sz="3430" dirty="0" err="1">
+                <a:solidFill>
+                  <a:srgbClr val="000000"/>
+                </a:solidFill>
+                <a:latin typeface="Open Sans 2"/>
+                <a:ea typeface="Open Sans 2"/>
+                <a:cs typeface="Open Sans 2"/>
+                <a:sym typeface="Open Sans 2"/>
+              </a:rPr>
+              <a:t>acesso</a:t>
+            </a:r>
+            <a:r>
+              <a:rPr lang="en-US" sz="3430" dirty="0">
+                <a:solidFill>
+                  <a:srgbClr val="000000"/>
+                </a:solidFill>
+                <a:latin typeface="Open Sans 2"/>
+                <a:ea typeface="Open Sans 2"/>
+                <a:cs typeface="Open Sans 2"/>
+                <a:sym typeface="Open Sans 2"/>
+              </a:rPr>
+              <a:t> </a:t>
+            </a:r>
+            <a:r>
+              <a:rPr lang="en-US" sz="3430" dirty="0" err="1">
+                <a:solidFill>
+                  <a:srgbClr val="000000"/>
+                </a:solidFill>
+                <a:latin typeface="Open Sans 2"/>
+                <a:ea typeface="Open Sans 2"/>
+                <a:cs typeface="Open Sans 2"/>
+                <a:sym typeface="Open Sans 2"/>
+              </a:rPr>
+              <a:t>às</a:t>
+            </a:r>
+            <a:r>
+              <a:rPr lang="en-US" sz="3430" dirty="0">
+                <a:solidFill>
+                  <a:srgbClr val="000000"/>
+                </a:solidFill>
+                <a:latin typeface="Open Sans 2"/>
+                <a:ea typeface="Open Sans 2"/>
+                <a:cs typeface="Open Sans 2"/>
+                <a:sym typeface="Open Sans 2"/>
+              </a:rPr>
+              <a:t> </a:t>
+            </a:r>
+            <a:r>
+              <a:rPr lang="en-US" sz="3430" dirty="0" err="1">
+                <a:solidFill>
+                  <a:srgbClr val="000000"/>
+                </a:solidFill>
+                <a:latin typeface="Open Sans 2"/>
+                <a:ea typeface="Open Sans 2"/>
+                <a:cs typeface="Open Sans 2"/>
+                <a:sym typeface="Open Sans 2"/>
+              </a:rPr>
+              <a:t>funcionalidades</a:t>
+            </a:r>
+            <a:r>
+              <a:rPr lang="en-US" sz="3430" dirty="0">
+                <a:solidFill>
+                  <a:srgbClr val="000000"/>
+                </a:solidFill>
+                <a:latin typeface="Open Sans 2"/>
+                <a:ea typeface="Open Sans 2"/>
+                <a:cs typeface="Open Sans 2"/>
+                <a:sym typeface="Open Sans 2"/>
+              </a:rPr>
+              <a:t> do Sistema e à </a:t>
+            </a:r>
+            <a:r>
+              <a:rPr lang="en-US" sz="3430" dirty="0" err="1">
+                <a:solidFill>
+                  <a:srgbClr val="000000"/>
+                </a:solidFill>
+                <a:latin typeface="Open Sans 2"/>
+                <a:ea typeface="Open Sans 2"/>
+                <a:cs typeface="Open Sans 2"/>
+                <a:sym typeface="Open Sans 2"/>
+              </a:rPr>
+              <a:t>visualização</a:t>
+            </a:r>
+            <a:r>
+              <a:rPr lang="en-US" sz="3430" dirty="0">
+                <a:solidFill>
+                  <a:srgbClr val="000000"/>
+                </a:solidFill>
+                <a:latin typeface="Open Sans 2"/>
+                <a:ea typeface="Open Sans 2"/>
+                <a:cs typeface="Open Sans 2"/>
+                <a:sym typeface="Open Sans 2"/>
+              </a:rPr>
+              <a:t> das </a:t>
+            </a:r>
+            <a:r>
+              <a:rPr lang="en-US" sz="3430" dirty="0" err="1">
+                <a:solidFill>
+                  <a:srgbClr val="000000"/>
+                </a:solidFill>
+                <a:latin typeface="Open Sans 2"/>
+                <a:ea typeface="Open Sans 2"/>
+                <a:cs typeface="Open Sans 2"/>
+                <a:sym typeface="Open Sans 2"/>
+              </a:rPr>
+              <a:t>informações</a:t>
+            </a:r>
+            <a:r>
+              <a:rPr lang="en-US" sz="3430" dirty="0">
+                <a:solidFill>
+                  <a:srgbClr val="000000"/>
+                </a:solidFill>
+                <a:latin typeface="Open Sans 2"/>
+                <a:ea typeface="Open Sans 2"/>
+                <a:cs typeface="Open Sans 2"/>
+                <a:sym typeface="Open Sans 2"/>
+              </a:rPr>
+              <a:t> </a:t>
+            </a:r>
+            <a:r>
+              <a:rPr lang="en-US" sz="3430" dirty="0" err="1">
+                <a:solidFill>
+                  <a:srgbClr val="000000"/>
+                </a:solidFill>
+                <a:latin typeface="Open Sans 2"/>
+                <a:ea typeface="Open Sans 2"/>
+                <a:cs typeface="Open Sans 2"/>
+                <a:sym typeface="Open Sans 2"/>
+              </a:rPr>
+              <a:t>pelas</a:t>
+            </a:r>
+            <a:r>
+              <a:rPr lang="en-US" sz="3430" dirty="0">
+                <a:solidFill>
+                  <a:srgbClr val="000000"/>
+                </a:solidFill>
+                <a:latin typeface="Open Sans 2"/>
+                <a:ea typeface="Open Sans 2"/>
+                <a:cs typeface="Open Sans 2"/>
+                <a:sym typeface="Open Sans 2"/>
+              </a:rPr>
+              <a:t> </a:t>
+            </a:r>
+            <a:r>
+              <a:rPr lang="en-US" sz="3430" dirty="0" err="1">
+                <a:solidFill>
+                  <a:srgbClr val="000000"/>
+                </a:solidFill>
+                <a:latin typeface="Open Sans 2"/>
+                <a:ea typeface="Open Sans 2"/>
+                <a:cs typeface="Open Sans 2"/>
+                <a:sym typeface="Open Sans 2"/>
+              </a:rPr>
+              <a:t>intituições</a:t>
+            </a:r>
+            <a:r>
+              <a:rPr lang="en-US" sz="3430" dirty="0">
+                <a:solidFill>
+                  <a:srgbClr val="000000"/>
+                </a:solidFill>
+                <a:latin typeface="Open Sans 2"/>
+                <a:ea typeface="Open Sans 2"/>
+                <a:cs typeface="Open Sans 2"/>
+                <a:sym typeface="Open Sans 2"/>
+              </a:rPr>
+              <a:t> de Ensino.</a:t>
             </a:r>
           </a:p>
         </p:txBody>
       </p:sp>
-      <p:graphicFrame>
-        <p:nvGraphicFramePr>
-          <p:cNvPr id="64" name="Gráfico 63">
+      <p:sp>
+        <p:nvSpPr>
+          <p:cNvPr id="60" name="TextBox 49">
             <a:extLst>
               <a:ext uri="{FF2B5EF4-FFF2-40B4-BE49-F238E27FC236}">
-                <a16:creationId xmlns:a16="http://schemas.microsoft.com/office/drawing/2014/main" id="{C5DE73EC-48C8-D959-1906-EE858C54593B}"/>
-              </a:ext>
-            </a:extLst>
-          </p:cNvPr>
-          <p:cNvGraphicFramePr/>
-          <p:nvPr>
-            <p:extLst>
-              <p:ext uri="{D42A27DB-BD31-4B8C-83A1-F6EECF244321}">
-                <p14:modId xmlns:p14="http://schemas.microsoft.com/office/powerpoint/2010/main" val="1874461378"/>
-              </p:ext>
-            </p:extLst>
-          </p:nvPr>
-        </p:nvGraphicFramePr>
-        <p:xfrm>
-          <a:off x="15628893" y="17368872"/>
-          <a:ext cx="11904157" cy="6223786"/>
-        </p:xfrm>
-        <a:graphic>
-          <a:graphicData uri="http://schemas.openxmlformats.org/drawingml/2006/chart">
-            <c:chart xmlns:c="http://schemas.openxmlformats.org/drawingml/2006/chart" xmlns:r="http://schemas.openxmlformats.org/officeDocument/2006/relationships" r:id="rId6"/>
-          </a:graphicData>
-        </a:graphic>
-      </p:graphicFrame>
-      <p:sp>
-        <p:nvSpPr>
-          <p:cNvPr id="65" name="TextBox 57">
-            <a:extLst>
-              <a:ext uri="{FF2B5EF4-FFF2-40B4-BE49-F238E27FC236}">
-                <a16:creationId xmlns:a16="http://schemas.microsoft.com/office/drawing/2014/main" id="{40811184-0301-61EE-177F-A891EE5466F2}"/>
+                <a16:creationId xmlns:a16="http://schemas.microsoft.com/office/drawing/2014/main" id="{C5307E39-CFCF-0DAF-9598-61BBEF259CE8}"/>
               </a:ext>
             </a:extLst>
           </p:cNvPr>
@@ -8385,8 +8165,8 @@
         </p:nvSpPr>
         <p:spPr>
           <a:xfrm>
-            <a:off x="15938204" y="24947983"/>
-            <a:ext cx="11263377" cy="4222694"/>
+            <a:off x="22521643" y="16811566"/>
+            <a:ext cx="4851011" cy="619337"/>
           </a:xfrm>
           <a:prstGeom prst="rect">
             <a:avLst/>
@@ -8398,18 +8178,272 @@
           </a:bodyPr>
           <a:lstStyle/>
           <a:p>
-            <a:pPr algn="just"/>
-            <a:r>
-              <a:rPr lang="pt-BR" sz="3430" dirty="0">
+            <a:pPr algn="r">
+              <a:lnSpc>
+                <a:spcPts val="4810"/>
+              </a:lnSpc>
+            </a:pPr>
+            <a:r>
+              <a:rPr lang="en-US" sz="4762" b="1" spc="179" dirty="0">
+                <a:solidFill>
+                  <a:srgbClr val="000000"/>
+                </a:solidFill>
+                <a:latin typeface="Open Sans 1 Bold"/>
+                <a:ea typeface="Open Sans 1 Bold"/>
+                <a:cs typeface="Open Sans 1 Bold"/>
+                <a:sym typeface="Open Sans 1 Bold"/>
+              </a:rPr>
+              <a:t>Tela de Login</a:t>
+            </a:r>
+          </a:p>
+        </p:txBody>
+      </p:sp>
+      <p:sp>
+        <p:nvSpPr>
+          <p:cNvPr id="63" name="TextBox 49">
+            <a:extLst>
+              <a:ext uri="{FF2B5EF4-FFF2-40B4-BE49-F238E27FC236}">
+                <a16:creationId xmlns:a16="http://schemas.microsoft.com/office/drawing/2014/main" id="{758904BC-5058-E8A9-B648-4B35F0C51836}"/>
+              </a:ext>
+            </a:extLst>
+          </p:cNvPr>
+          <p:cNvSpPr txBox="1"/>
+          <p:nvPr/>
+        </p:nvSpPr>
+        <p:spPr>
+          <a:xfrm>
+            <a:off x="15666343" y="24306089"/>
+            <a:ext cx="4830538" cy="1234890"/>
+          </a:xfrm>
+          <a:prstGeom prst="rect">
+            <a:avLst/>
+          </a:prstGeom>
+        </p:spPr>
+        <p:txBody>
+          <a:bodyPr wrap="square" lIns="0" tIns="0" rIns="0" bIns="0" rtlCol="0" anchor="t">
+            <a:spAutoFit/>
+          </a:bodyPr>
+          <a:lstStyle/>
+          <a:p>
+            <a:pPr>
+              <a:lnSpc>
+                <a:spcPts val="4810"/>
+              </a:lnSpc>
+            </a:pPr>
+            <a:r>
+              <a:rPr lang="en-US" sz="4762" b="1" spc="179" dirty="0">
+                <a:solidFill>
+                  <a:srgbClr val="000000"/>
+                </a:solidFill>
+                <a:latin typeface="Open Sans 1 Bold"/>
+                <a:ea typeface="Open Sans 1 Bold"/>
+                <a:cs typeface="Open Sans 1 Bold"/>
+                <a:sym typeface="Open Sans 1 Bold"/>
+              </a:rPr>
+              <a:t>Tela Inicial do Sistema</a:t>
+            </a:r>
+          </a:p>
+        </p:txBody>
+      </p:sp>
+      <p:sp>
+        <p:nvSpPr>
+          <p:cNvPr id="64" name="TextBox 54">
+            <a:extLst>
+              <a:ext uri="{FF2B5EF4-FFF2-40B4-BE49-F238E27FC236}">
+                <a16:creationId xmlns:a16="http://schemas.microsoft.com/office/drawing/2014/main" id="{32C611E5-4313-2158-A4AE-53D9AD5C460D}"/>
+              </a:ext>
+            </a:extLst>
+          </p:cNvPr>
+          <p:cNvSpPr txBox="1"/>
+          <p:nvPr/>
+        </p:nvSpPr>
+        <p:spPr>
+          <a:xfrm>
+            <a:off x="22426780" y="17450294"/>
+            <a:ext cx="4777775" cy="3645357"/>
+          </a:xfrm>
+          <a:prstGeom prst="rect">
+            <a:avLst/>
+          </a:prstGeom>
+        </p:spPr>
+        <p:txBody>
+          <a:bodyPr wrap="square" lIns="0" tIns="0" rIns="0" bIns="0" rtlCol="0" anchor="t">
+            <a:spAutoFit/>
+          </a:bodyPr>
+          <a:lstStyle/>
+          <a:p>
+            <a:pPr algn="r">
+              <a:lnSpc>
+                <a:spcPts val="4802"/>
+              </a:lnSpc>
+            </a:pPr>
+            <a:r>
+              <a:rPr lang="pt-BR" sz="3200" dirty="0">
                 <a:latin typeface="Open Sans 2" panose="020B0604020202020204" charset="0"/>
                 <a:ea typeface="Open Sans 2" panose="020B0604020202020204" charset="0"/>
                 <a:cs typeface="Open Sans 2" panose="020B0604020202020204" charset="0"/>
               </a:rPr>
-              <a:t>Outro ponto relevante foi a centralização das informações, permitindo o gerenciamento organizado de escolas, pacotes e jogos em um único ambiente. Dessa forma, a solução desenvolvida contribui diretamente para a melhoria da gestão de plataformas educacionais digitais, proporcionando maior segurança, controle e eficiência no uso dos recursos disponíveis.</a:t>
-            </a:r>
+              <a:t>Tela responsável pela autenticação do usuário (escola). O sistema valida as credenciais e verifica se o IP de origem está autorizado para acesso.</a:t>
+            </a:r>
+            <a:endParaRPr lang="en-US" sz="3200" dirty="0">
+              <a:solidFill>
+                <a:srgbClr val="000000"/>
+              </a:solidFill>
+              <a:latin typeface="Open Sans 2" panose="020B0604020202020204" charset="0"/>
+              <a:ea typeface="Open Sans 2" panose="020B0604020202020204" charset="0"/>
+              <a:cs typeface="Open Sans 2" panose="020B0604020202020204" charset="0"/>
+              <a:sym typeface="Open Sans 2"/>
+            </a:endParaRPr>
           </a:p>
         </p:txBody>
       </p:sp>
+      <p:sp>
+        <p:nvSpPr>
+          <p:cNvPr id="65" name="TextBox 54">
+            <a:extLst>
+              <a:ext uri="{FF2B5EF4-FFF2-40B4-BE49-F238E27FC236}">
+                <a16:creationId xmlns:a16="http://schemas.microsoft.com/office/drawing/2014/main" id="{7EAB10BE-1542-8439-2813-7746BBF5AF3C}"/>
+              </a:ext>
+            </a:extLst>
+          </p:cNvPr>
+          <p:cNvSpPr txBox="1"/>
+          <p:nvPr/>
+        </p:nvSpPr>
+        <p:spPr>
+          <a:xfrm>
+            <a:off x="15601564" y="25606915"/>
+            <a:ext cx="4909695" cy="3029804"/>
+          </a:xfrm>
+          <a:prstGeom prst="rect">
+            <a:avLst/>
+          </a:prstGeom>
+        </p:spPr>
+        <p:txBody>
+          <a:bodyPr wrap="square" lIns="0" tIns="0" rIns="0" bIns="0" rtlCol="0" anchor="t">
+            <a:spAutoFit/>
+          </a:bodyPr>
+          <a:lstStyle/>
+          <a:p>
+            <a:pPr>
+              <a:lnSpc>
+                <a:spcPts val="4802"/>
+              </a:lnSpc>
+            </a:pPr>
+            <a:r>
+              <a:rPr lang="pt-BR" sz="3200" dirty="0">
+                <a:latin typeface="Open Sans 2" panose="020B0604020202020204" charset="0"/>
+                <a:ea typeface="Open Sans 2" panose="020B0604020202020204" charset="0"/>
+                <a:cs typeface="Open Sans 2" panose="020B0604020202020204" charset="0"/>
+              </a:rPr>
+              <a:t>Após o login, a escola visualiza os cursos disponíveis e acessa os jogos educacionais autorizados.</a:t>
+            </a:r>
+            <a:endParaRPr lang="en-US" sz="3430" dirty="0">
+              <a:solidFill>
+                <a:srgbClr val="000000"/>
+              </a:solidFill>
+              <a:latin typeface="Open Sans 2" panose="020B0604020202020204" charset="0"/>
+              <a:ea typeface="Open Sans 2" panose="020B0604020202020204" charset="0"/>
+              <a:cs typeface="Open Sans 2" panose="020B0604020202020204" charset="0"/>
+              <a:sym typeface="Open Sans 2"/>
+            </a:endParaRPr>
+          </a:p>
+        </p:txBody>
+      </p:sp>
+      <p:sp>
+        <p:nvSpPr>
+          <p:cNvPr id="67" name="Freeform 13">
+            <a:extLst>
+              <a:ext uri="{FF2B5EF4-FFF2-40B4-BE49-F238E27FC236}">
+                <a16:creationId xmlns:a16="http://schemas.microsoft.com/office/drawing/2014/main" id="{438380FE-C225-D473-1485-19F4DFC401A9}"/>
+              </a:ext>
+            </a:extLst>
+          </p:cNvPr>
+          <p:cNvSpPr/>
+          <p:nvPr/>
+        </p:nvSpPr>
+        <p:spPr>
+          <a:xfrm>
+            <a:off x="15258578" y="16667257"/>
+            <a:ext cx="6705185" cy="5233817"/>
+          </a:xfrm>
+          <a:custGeom>
+            <a:avLst/>
+            <a:gdLst/>
+            <a:ahLst/>
+            <a:cxnLst/>
+            <a:rect l="l" t="t" r="r" b="b"/>
+            <a:pathLst>
+              <a:path w="5792928" h="4654791">
+                <a:moveTo>
+                  <a:pt x="0" y="0"/>
+                </a:moveTo>
+                <a:lnTo>
+                  <a:pt x="5792928" y="0"/>
+                </a:lnTo>
+                <a:lnTo>
+                  <a:pt x="5792928" y="4654791"/>
+                </a:lnTo>
+                <a:lnTo>
+                  <a:pt x="0" y="4654791"/>
+                </a:lnTo>
+                <a:lnTo>
+                  <a:pt x="0" y="0"/>
+                </a:lnTo>
+                <a:close/>
+              </a:path>
+            </a:pathLst>
+          </a:custGeom>
+          <a:blipFill>
+            <a:blip r:embed="rId6"/>
+            <a:stretch>
+              <a:fillRect l="-5904" r="-935"/>
+            </a:stretch>
+          </a:blipFill>
+        </p:spPr>
+        <p:txBody>
+          <a:bodyPr/>
+          <a:lstStyle/>
+          <a:p>
+            <a:endParaRPr lang="pt-BR"/>
+          </a:p>
+        </p:txBody>
+      </p:sp>
+      <p:pic>
+        <p:nvPicPr>
+          <p:cNvPr id="69" name="Imagem 68" descr="Interface gráfica do usuário, Texto, Aplicativo, chat ou mensagem de texto&#10;&#10;O conteúdo gerado por IA pode estar incorreto.">
+            <a:extLst>
+              <a:ext uri="{FF2B5EF4-FFF2-40B4-BE49-F238E27FC236}">
+                <a16:creationId xmlns:a16="http://schemas.microsoft.com/office/drawing/2014/main" id="{C52E2C06-AD76-36AB-3799-798CCA3B3EEB}"/>
+              </a:ext>
+            </a:extLst>
+          </p:cNvPr>
+          <p:cNvPicPr>
+            <a:picLocks noChangeAspect="1"/>
+          </p:cNvPicPr>
+          <p:nvPr/>
+        </p:nvPicPr>
+        <p:blipFill>
+          <a:blip r:embed="rId8">
+            <a:extLst>
+              <a:ext uri="{28A0092B-C50C-407E-A947-70E740481C1C}">
+                <a14:useLocalDpi xmlns:a14="http://schemas.microsoft.com/office/drawing/2010/main" val="0"/>
+              </a:ext>
+            </a:extLst>
+          </a:blip>
+          <a:stretch>
+            <a:fillRect/>
+          </a:stretch>
+        </p:blipFill>
+        <p:spPr>
+          <a:xfrm>
+            <a:off x="15671165" y="16811566"/>
+            <a:ext cx="5815647" cy="3361606"/>
+          </a:xfrm>
+          <a:prstGeom prst="rect">
+            <a:avLst/>
+          </a:prstGeom>
+        </p:spPr>
+      </p:pic>
     </p:spTree>
   </p:cSld>
   <p:clrMapOvr>
